--- a/Document/SoC_Design.pptx
+++ b/Document/SoC_Design.pptx
@@ -10,6 +10,7 @@
     <p:sldId id="257" r:id="rId4"/>
     <p:sldId id="258" r:id="rId5"/>
     <p:sldId id="259" r:id="rId6"/>
+    <p:sldId id="261" r:id="rId7"/>
   </p:sldIdLst>
   <p:sldSz cx="12192000" cy="6858000"/>
   <p:notesSz cx="6858000" cy="9144000"/>
@@ -263,7 +264,7 @@
           <a:p>
             <a:fld id="{91FFFBF6-1629-4DED-BCA1-F2A96F07D974}" type="datetimeFigureOut">
               <a:rPr lang="ko-KR" altLang="en-US" smtClean="0"/>
-              <a:t>2026-04-25</a:t>
+              <a:t>2026-05-04</a:t>
             </a:fld>
             <a:endParaRPr lang="ko-KR" altLang="en-US"/>
           </a:p>
@@ -461,7 +462,7 @@
           <a:p>
             <a:fld id="{91FFFBF6-1629-4DED-BCA1-F2A96F07D974}" type="datetimeFigureOut">
               <a:rPr lang="ko-KR" altLang="en-US" smtClean="0"/>
-              <a:t>2026-04-25</a:t>
+              <a:t>2026-05-04</a:t>
             </a:fld>
             <a:endParaRPr lang="ko-KR" altLang="en-US"/>
           </a:p>
@@ -669,7 +670,7 @@
           <a:p>
             <a:fld id="{91FFFBF6-1629-4DED-BCA1-F2A96F07D974}" type="datetimeFigureOut">
               <a:rPr lang="ko-KR" altLang="en-US" smtClean="0"/>
-              <a:t>2026-04-25</a:t>
+              <a:t>2026-05-04</a:t>
             </a:fld>
             <a:endParaRPr lang="ko-KR" altLang="en-US"/>
           </a:p>
@@ -867,7 +868,7 @@
           <a:p>
             <a:fld id="{91FFFBF6-1629-4DED-BCA1-F2A96F07D974}" type="datetimeFigureOut">
               <a:rPr lang="ko-KR" altLang="en-US" smtClean="0"/>
-              <a:t>2026-04-25</a:t>
+              <a:t>2026-05-04</a:t>
             </a:fld>
             <a:endParaRPr lang="ko-KR" altLang="en-US"/>
           </a:p>
@@ -1142,7 +1143,7 @@
           <a:p>
             <a:fld id="{91FFFBF6-1629-4DED-BCA1-F2A96F07D974}" type="datetimeFigureOut">
               <a:rPr lang="ko-KR" altLang="en-US" smtClean="0"/>
-              <a:t>2026-04-25</a:t>
+              <a:t>2026-05-04</a:t>
             </a:fld>
             <a:endParaRPr lang="ko-KR" altLang="en-US"/>
           </a:p>
@@ -1407,7 +1408,7 @@
           <a:p>
             <a:fld id="{91FFFBF6-1629-4DED-BCA1-F2A96F07D974}" type="datetimeFigureOut">
               <a:rPr lang="ko-KR" altLang="en-US" smtClean="0"/>
-              <a:t>2026-04-25</a:t>
+              <a:t>2026-05-04</a:t>
             </a:fld>
             <a:endParaRPr lang="ko-KR" altLang="en-US"/>
           </a:p>
@@ -1819,7 +1820,7 @@
           <a:p>
             <a:fld id="{91FFFBF6-1629-4DED-BCA1-F2A96F07D974}" type="datetimeFigureOut">
               <a:rPr lang="ko-KR" altLang="en-US" smtClean="0"/>
-              <a:t>2026-04-25</a:t>
+              <a:t>2026-05-04</a:t>
             </a:fld>
             <a:endParaRPr lang="ko-KR" altLang="en-US"/>
           </a:p>
@@ -1960,7 +1961,7 @@
           <a:p>
             <a:fld id="{91FFFBF6-1629-4DED-BCA1-F2A96F07D974}" type="datetimeFigureOut">
               <a:rPr lang="ko-KR" altLang="en-US" smtClean="0"/>
-              <a:t>2026-04-25</a:t>
+              <a:t>2026-05-04</a:t>
             </a:fld>
             <a:endParaRPr lang="ko-KR" altLang="en-US"/>
           </a:p>
@@ -2073,7 +2074,7 @@
           <a:p>
             <a:fld id="{91FFFBF6-1629-4DED-BCA1-F2A96F07D974}" type="datetimeFigureOut">
               <a:rPr lang="ko-KR" altLang="en-US" smtClean="0"/>
-              <a:t>2026-04-25</a:t>
+              <a:t>2026-05-04</a:t>
             </a:fld>
             <a:endParaRPr lang="ko-KR" altLang="en-US"/>
           </a:p>
@@ -2384,7 +2385,7 @@
           <a:p>
             <a:fld id="{91FFFBF6-1629-4DED-BCA1-F2A96F07D974}" type="datetimeFigureOut">
               <a:rPr lang="ko-KR" altLang="en-US" smtClean="0"/>
-              <a:t>2026-04-25</a:t>
+              <a:t>2026-05-04</a:t>
             </a:fld>
             <a:endParaRPr lang="ko-KR" altLang="en-US"/>
           </a:p>
@@ -2672,7 +2673,7 @@
           <a:p>
             <a:fld id="{91FFFBF6-1629-4DED-BCA1-F2A96F07D974}" type="datetimeFigureOut">
               <a:rPr lang="ko-KR" altLang="en-US" smtClean="0"/>
-              <a:t>2026-04-25</a:t>
+              <a:t>2026-05-04</a:t>
             </a:fld>
             <a:endParaRPr lang="ko-KR" altLang="en-US"/>
           </a:p>
@@ -2913,7 +2914,7 @@
           <a:p>
             <a:fld id="{91FFFBF6-1629-4DED-BCA1-F2A96F07D974}" type="datetimeFigureOut">
               <a:rPr lang="ko-KR" altLang="en-US" smtClean="0"/>
-              <a:t>2026-04-25</a:t>
+              <a:t>2026-05-04</a:t>
             </a:fld>
             <a:endParaRPr lang="ko-KR" altLang="en-US"/>
           </a:p>
@@ -15537,8 +15538,8 @@
         </p:blipFill>
         <p:spPr>
           <a:xfrm>
-            <a:off x="2560158" y="1114102"/>
-            <a:ext cx="6868484" cy="4629796"/>
+            <a:off x="2032990" y="758757"/>
+            <a:ext cx="7922820" cy="5340486"/>
           </a:xfrm>
           <a:prstGeom prst="rect">
             <a:avLst/>
@@ -15549,6 +15550,117 @@
     <p:extLst>
       <p:ext uri="{BB962C8B-B14F-4D97-AF65-F5344CB8AC3E}">
         <p14:creationId xmlns:p14="http://schemas.microsoft.com/office/powerpoint/2010/main" val="1138359522"/>
+      </p:ext>
+    </p:extLst>
+  </p:cSld>
+  <p:clrMapOvr>
+    <a:masterClrMapping/>
+  </p:clrMapOvr>
+</p:sld>
+</file>
+
+<file path=ppt/slides/slide6.xml><?xml version="1.0" encoding="utf-8"?>
+<p:sld xmlns:a="http://schemas.openxmlformats.org/drawingml/2006/main" xmlns:r="http://schemas.openxmlformats.org/officeDocument/2006/relationships" xmlns:p="http://schemas.openxmlformats.org/presentationml/2006/main">
+  <p:cSld>
+    <p:spTree>
+      <p:nvGrpSpPr>
+        <p:cNvPr id="1" name="">
+          <a:extLst>
+            <a:ext uri="{FF2B5EF4-FFF2-40B4-BE49-F238E27FC236}">
+              <a16:creationId xmlns:a16="http://schemas.microsoft.com/office/drawing/2014/main" id="{57CA9501-DEB9-3712-B214-D2A24193A1CF}"/>
+            </a:ext>
+          </a:extLst>
+        </p:cNvPr>
+        <p:cNvGrpSpPr/>
+        <p:nvPr/>
+      </p:nvGrpSpPr>
+      <p:grpSpPr>
+        <a:xfrm>
+          <a:off x="0" y="0"/>
+          <a:ext cx="0" cy="0"/>
+          <a:chOff x="0" y="0"/>
+          <a:chExt cx="0" cy="0"/>
+        </a:xfrm>
+      </p:grpSpPr>
+      <p:sp>
+        <p:nvSpPr>
+          <p:cNvPr id="5" name="TextBox 4">
+            <a:extLst>
+              <a:ext uri="{FF2B5EF4-FFF2-40B4-BE49-F238E27FC236}">
+                <a16:creationId xmlns:a16="http://schemas.microsoft.com/office/drawing/2014/main" id="{8DF840EB-1D3B-C309-9134-D3DE7741779A}"/>
+              </a:ext>
+            </a:extLst>
+          </p:cNvPr>
+          <p:cNvSpPr txBox="1"/>
+          <p:nvPr/>
+        </p:nvSpPr>
+        <p:spPr>
+          <a:xfrm>
+            <a:off x="341745" y="249198"/>
+            <a:ext cx="5652655" cy="400110"/>
+          </a:xfrm>
+          <a:prstGeom prst="rect">
+            <a:avLst/>
+          </a:prstGeom>
+          <a:noFill/>
+        </p:spPr>
+        <p:txBody>
+          <a:bodyPr wrap="square" rtlCol="0">
+            <a:spAutoFit/>
+          </a:bodyPr>
+          <a:lstStyle/>
+          <a:p>
+            <a:r>
+              <a:rPr lang="en-US" altLang="ko-KR" sz="2000" dirty="0">
+                <a:latin typeface="+mj-ea"/>
+                <a:ea typeface="+mj-ea"/>
+              </a:rPr>
+              <a:t>1. Pipeline </a:t>
+            </a:r>
+            <a:r>
+              <a:rPr lang="ko-KR" altLang="en-US" sz="2000" dirty="0">
+                <a:latin typeface="+mj-ea"/>
+                <a:ea typeface="+mj-ea"/>
+              </a:rPr>
+              <a:t>설계</a:t>
+            </a:r>
+          </a:p>
+        </p:txBody>
+      </p:sp>
+      <p:pic>
+        <p:nvPicPr>
+          <p:cNvPr id="2" name="그림 1">
+            <a:extLst>
+              <a:ext uri="{FF2B5EF4-FFF2-40B4-BE49-F238E27FC236}">
+                <a16:creationId xmlns:a16="http://schemas.microsoft.com/office/drawing/2014/main" id="{92525BF5-A585-EA78-97B4-F4D3C190EDFE}"/>
+              </a:ext>
+            </a:extLst>
+          </p:cNvPr>
+          <p:cNvPicPr>
+            <a:picLocks noChangeAspect="1"/>
+          </p:cNvPicPr>
+          <p:nvPr/>
+        </p:nvPicPr>
+        <p:blipFill>
+          <a:blip r:embed="rId2"/>
+          <a:stretch>
+            <a:fillRect/>
+          </a:stretch>
+        </p:blipFill>
+        <p:spPr>
+          <a:xfrm>
+            <a:off x="1890684" y="665540"/>
+            <a:ext cx="8207432" cy="5526920"/>
+          </a:xfrm>
+          <a:prstGeom prst="rect">
+            <a:avLst/>
+          </a:prstGeom>
+        </p:spPr>
+      </p:pic>
+    </p:spTree>
+    <p:extLst>
+      <p:ext uri="{BB962C8B-B14F-4D97-AF65-F5344CB8AC3E}">
+        <p14:creationId xmlns:p14="http://schemas.microsoft.com/office/powerpoint/2010/main" val="1279303762"/>
       </p:ext>
     </p:extLst>
   </p:cSld>

--- a/Document/SoC_Design.pptx
+++ b/Document/SoC_Design.pptx
@@ -11,6 +11,8 @@
     <p:sldId id="258" r:id="rId5"/>
     <p:sldId id="259" r:id="rId6"/>
     <p:sldId id="261" r:id="rId7"/>
+    <p:sldId id="262" r:id="rId8"/>
+    <p:sldId id="263" r:id="rId9"/>
   </p:sldIdLst>
   <p:sldSz cx="12192000" cy="6858000"/>
   <p:notesSz cx="6858000" cy="9144000"/>
@@ -264,7 +266,7 @@
           <a:p>
             <a:fld id="{91FFFBF6-1629-4DED-BCA1-F2A96F07D974}" type="datetimeFigureOut">
               <a:rPr lang="ko-KR" altLang="en-US" smtClean="0"/>
-              <a:t>2026-05-04</a:t>
+              <a:t>2026-05-17</a:t>
             </a:fld>
             <a:endParaRPr lang="ko-KR" altLang="en-US"/>
           </a:p>
@@ -462,7 +464,7 @@
           <a:p>
             <a:fld id="{91FFFBF6-1629-4DED-BCA1-F2A96F07D974}" type="datetimeFigureOut">
               <a:rPr lang="ko-KR" altLang="en-US" smtClean="0"/>
-              <a:t>2026-05-04</a:t>
+              <a:t>2026-05-17</a:t>
             </a:fld>
             <a:endParaRPr lang="ko-KR" altLang="en-US"/>
           </a:p>
@@ -670,7 +672,7 @@
           <a:p>
             <a:fld id="{91FFFBF6-1629-4DED-BCA1-F2A96F07D974}" type="datetimeFigureOut">
               <a:rPr lang="ko-KR" altLang="en-US" smtClean="0"/>
-              <a:t>2026-05-04</a:t>
+              <a:t>2026-05-17</a:t>
             </a:fld>
             <a:endParaRPr lang="ko-KR" altLang="en-US"/>
           </a:p>
@@ -868,7 +870,7 @@
           <a:p>
             <a:fld id="{91FFFBF6-1629-4DED-BCA1-F2A96F07D974}" type="datetimeFigureOut">
               <a:rPr lang="ko-KR" altLang="en-US" smtClean="0"/>
-              <a:t>2026-05-04</a:t>
+              <a:t>2026-05-17</a:t>
             </a:fld>
             <a:endParaRPr lang="ko-KR" altLang="en-US"/>
           </a:p>
@@ -1143,7 +1145,7 @@
           <a:p>
             <a:fld id="{91FFFBF6-1629-4DED-BCA1-F2A96F07D974}" type="datetimeFigureOut">
               <a:rPr lang="ko-KR" altLang="en-US" smtClean="0"/>
-              <a:t>2026-05-04</a:t>
+              <a:t>2026-05-17</a:t>
             </a:fld>
             <a:endParaRPr lang="ko-KR" altLang="en-US"/>
           </a:p>
@@ -1408,7 +1410,7 @@
           <a:p>
             <a:fld id="{91FFFBF6-1629-4DED-BCA1-F2A96F07D974}" type="datetimeFigureOut">
               <a:rPr lang="ko-KR" altLang="en-US" smtClean="0"/>
-              <a:t>2026-05-04</a:t>
+              <a:t>2026-05-17</a:t>
             </a:fld>
             <a:endParaRPr lang="ko-KR" altLang="en-US"/>
           </a:p>
@@ -1820,7 +1822,7 @@
           <a:p>
             <a:fld id="{91FFFBF6-1629-4DED-BCA1-F2A96F07D974}" type="datetimeFigureOut">
               <a:rPr lang="ko-KR" altLang="en-US" smtClean="0"/>
-              <a:t>2026-05-04</a:t>
+              <a:t>2026-05-17</a:t>
             </a:fld>
             <a:endParaRPr lang="ko-KR" altLang="en-US"/>
           </a:p>
@@ -1961,7 +1963,7 @@
           <a:p>
             <a:fld id="{91FFFBF6-1629-4DED-BCA1-F2A96F07D974}" type="datetimeFigureOut">
               <a:rPr lang="ko-KR" altLang="en-US" smtClean="0"/>
-              <a:t>2026-05-04</a:t>
+              <a:t>2026-05-17</a:t>
             </a:fld>
             <a:endParaRPr lang="ko-KR" altLang="en-US"/>
           </a:p>
@@ -2074,7 +2076,7 @@
           <a:p>
             <a:fld id="{91FFFBF6-1629-4DED-BCA1-F2A96F07D974}" type="datetimeFigureOut">
               <a:rPr lang="ko-KR" altLang="en-US" smtClean="0"/>
-              <a:t>2026-05-04</a:t>
+              <a:t>2026-05-17</a:t>
             </a:fld>
             <a:endParaRPr lang="ko-KR" altLang="en-US"/>
           </a:p>
@@ -2385,7 +2387,7 @@
           <a:p>
             <a:fld id="{91FFFBF6-1629-4DED-BCA1-F2A96F07D974}" type="datetimeFigureOut">
               <a:rPr lang="ko-KR" altLang="en-US" smtClean="0"/>
-              <a:t>2026-05-04</a:t>
+              <a:t>2026-05-17</a:t>
             </a:fld>
             <a:endParaRPr lang="ko-KR" altLang="en-US"/>
           </a:p>
@@ -2673,7 +2675,7 @@
           <a:p>
             <a:fld id="{91FFFBF6-1629-4DED-BCA1-F2A96F07D974}" type="datetimeFigureOut">
               <a:rPr lang="ko-KR" altLang="en-US" smtClean="0"/>
-              <a:t>2026-05-04</a:t>
+              <a:t>2026-05-17</a:t>
             </a:fld>
             <a:endParaRPr lang="ko-KR" altLang="en-US"/>
           </a:p>
@@ -2914,7 +2916,7 @@
           <a:p>
             <a:fld id="{91FFFBF6-1629-4DED-BCA1-F2A96F07D974}" type="datetimeFigureOut">
               <a:rPr lang="ko-KR" altLang="en-US" smtClean="0"/>
-              <a:t>2026-05-04</a:t>
+              <a:t>2026-05-17</a:t>
             </a:fld>
             <a:endParaRPr lang="ko-KR" altLang="en-US"/>
           </a:p>
@@ -15670,6 +15672,1771 @@
 </p:sld>
 </file>
 
+<file path=ppt/slides/slide7.xml><?xml version="1.0" encoding="utf-8"?>
+<p:sld xmlns:a="http://schemas.openxmlformats.org/drawingml/2006/main" xmlns:r="http://schemas.openxmlformats.org/officeDocument/2006/relationships" xmlns:p="http://schemas.openxmlformats.org/presentationml/2006/main">
+  <p:cSld>
+    <p:spTree>
+      <p:nvGrpSpPr>
+        <p:cNvPr id="1" name=""/>
+        <p:cNvGrpSpPr/>
+        <p:nvPr/>
+      </p:nvGrpSpPr>
+      <p:grpSpPr>
+        <a:xfrm>
+          <a:off x="0" y="0"/>
+          <a:ext cx="0" cy="0"/>
+          <a:chOff x="0" y="0"/>
+          <a:chExt cx="0" cy="0"/>
+        </a:xfrm>
+      </p:grpSpPr>
+      <p:grpSp>
+        <p:nvGrpSpPr>
+          <p:cNvPr id="78" name="그룹 77">
+            <a:extLst>
+              <a:ext uri="{FF2B5EF4-FFF2-40B4-BE49-F238E27FC236}">
+                <a16:creationId xmlns:a16="http://schemas.microsoft.com/office/drawing/2014/main" id="{1024A951-BF9A-41F4-701E-E152C414555D}"/>
+              </a:ext>
+            </a:extLst>
+          </p:cNvPr>
+          <p:cNvGrpSpPr/>
+          <p:nvPr/>
+        </p:nvGrpSpPr>
+        <p:grpSpPr>
+          <a:xfrm>
+            <a:off x="2032161" y="352425"/>
+            <a:ext cx="2805585" cy="1938337"/>
+            <a:chOff x="3670461" y="1533525"/>
+            <a:chExt cx="2805585" cy="1938337"/>
+          </a:xfrm>
+        </p:grpSpPr>
+        <p:grpSp>
+          <p:nvGrpSpPr>
+            <p:cNvPr id="68" name="그룹 67">
+              <a:extLst>
+                <a:ext uri="{FF2B5EF4-FFF2-40B4-BE49-F238E27FC236}">
+                  <a16:creationId xmlns:a16="http://schemas.microsoft.com/office/drawing/2014/main" id="{17ABB86A-C4C0-5D82-180F-25CABDD9A9F5}"/>
+                </a:ext>
+              </a:extLst>
+            </p:cNvPr>
+            <p:cNvGrpSpPr/>
+            <p:nvPr/>
+          </p:nvGrpSpPr>
+          <p:grpSpPr>
+            <a:xfrm>
+              <a:off x="4633913" y="1533525"/>
+              <a:ext cx="1147761" cy="1938337"/>
+              <a:chOff x="4633913" y="1533525"/>
+              <a:chExt cx="1147761" cy="1938337"/>
+            </a:xfrm>
+          </p:grpSpPr>
+          <p:cxnSp>
+            <p:nvCxnSpPr>
+              <p:cNvPr id="33" name="직선 연결선 32">
+                <a:extLst>
+                  <a:ext uri="{FF2B5EF4-FFF2-40B4-BE49-F238E27FC236}">
+                    <a16:creationId xmlns:a16="http://schemas.microsoft.com/office/drawing/2014/main" id="{F9F03A62-A02F-6999-3D87-CB8C54063B16}"/>
+                  </a:ext>
+                </a:extLst>
+              </p:cNvPr>
+              <p:cNvCxnSpPr>
+                <a:cxnSpLocks/>
+              </p:cNvCxnSpPr>
+              <p:nvPr/>
+            </p:nvCxnSpPr>
+            <p:spPr>
+              <a:xfrm>
+                <a:off x="4633913" y="1533525"/>
+                <a:ext cx="0" cy="804862"/>
+              </a:xfrm>
+              <a:prstGeom prst="line">
+                <a:avLst/>
+              </a:prstGeom>
+            </p:spPr>
+            <p:style>
+              <a:lnRef idx="2">
+                <a:schemeClr val="dk1"/>
+              </a:lnRef>
+              <a:fillRef idx="0">
+                <a:schemeClr val="dk1"/>
+              </a:fillRef>
+              <a:effectRef idx="1">
+                <a:schemeClr val="dk1"/>
+              </a:effectRef>
+              <a:fontRef idx="minor">
+                <a:schemeClr val="tx1"/>
+              </a:fontRef>
+            </p:style>
+          </p:cxnSp>
+          <p:cxnSp>
+            <p:nvCxnSpPr>
+              <p:cNvPr id="35" name="직선 연결선 34">
+                <a:extLst>
+                  <a:ext uri="{FF2B5EF4-FFF2-40B4-BE49-F238E27FC236}">
+                    <a16:creationId xmlns:a16="http://schemas.microsoft.com/office/drawing/2014/main" id="{2D618502-B97B-18A9-3C01-C2AA12FCD6DC}"/>
+                  </a:ext>
+                </a:extLst>
+              </p:cNvPr>
+              <p:cNvCxnSpPr>
+                <a:cxnSpLocks/>
+              </p:cNvCxnSpPr>
+              <p:nvPr/>
+            </p:nvCxnSpPr>
+            <p:spPr>
+              <a:xfrm>
+                <a:off x="4633913" y="2667000"/>
+                <a:ext cx="0" cy="804862"/>
+              </a:xfrm>
+              <a:prstGeom prst="line">
+                <a:avLst/>
+              </a:prstGeom>
+            </p:spPr>
+            <p:style>
+              <a:lnRef idx="2">
+                <a:schemeClr val="dk1"/>
+              </a:lnRef>
+              <a:fillRef idx="0">
+                <a:schemeClr val="dk1"/>
+              </a:fillRef>
+              <a:effectRef idx="1">
+                <a:schemeClr val="dk1"/>
+              </a:effectRef>
+              <a:fontRef idx="minor">
+                <a:schemeClr val="tx1"/>
+              </a:fontRef>
+            </p:style>
+          </p:cxnSp>
+          <p:cxnSp>
+            <p:nvCxnSpPr>
+              <p:cNvPr id="42" name="직선 연결선 41">
+                <a:extLst>
+                  <a:ext uri="{FF2B5EF4-FFF2-40B4-BE49-F238E27FC236}">
+                    <a16:creationId xmlns:a16="http://schemas.microsoft.com/office/drawing/2014/main" id="{072F1CCA-E18B-C620-EB00-B3D59C326358}"/>
+                  </a:ext>
+                </a:extLst>
+              </p:cNvPr>
+              <p:cNvCxnSpPr>
+                <a:cxnSpLocks/>
+              </p:cNvCxnSpPr>
+              <p:nvPr/>
+            </p:nvCxnSpPr>
+            <p:spPr>
+              <a:xfrm>
+                <a:off x="4633913" y="2338387"/>
+                <a:ext cx="158343" cy="164307"/>
+              </a:xfrm>
+              <a:prstGeom prst="line">
+                <a:avLst/>
+              </a:prstGeom>
+            </p:spPr>
+            <p:style>
+              <a:lnRef idx="2">
+                <a:schemeClr val="dk1"/>
+              </a:lnRef>
+              <a:fillRef idx="0">
+                <a:schemeClr val="dk1"/>
+              </a:fillRef>
+              <a:effectRef idx="1">
+                <a:schemeClr val="dk1"/>
+              </a:effectRef>
+              <a:fontRef idx="minor">
+                <a:schemeClr val="tx1"/>
+              </a:fontRef>
+            </p:style>
+          </p:cxnSp>
+          <p:cxnSp>
+            <p:nvCxnSpPr>
+              <p:cNvPr id="45" name="직선 연결선 44">
+                <a:extLst>
+                  <a:ext uri="{FF2B5EF4-FFF2-40B4-BE49-F238E27FC236}">
+                    <a16:creationId xmlns:a16="http://schemas.microsoft.com/office/drawing/2014/main" id="{3DF9AA0B-F08B-3DEB-F550-ECB5E3058935}"/>
+                  </a:ext>
+                </a:extLst>
+              </p:cNvPr>
+              <p:cNvCxnSpPr>
+                <a:cxnSpLocks/>
+              </p:cNvCxnSpPr>
+              <p:nvPr/>
+            </p:nvCxnSpPr>
+            <p:spPr>
+              <a:xfrm flipV="1">
+                <a:off x="4633913" y="2502694"/>
+                <a:ext cx="158343" cy="164306"/>
+              </a:xfrm>
+              <a:prstGeom prst="line">
+                <a:avLst/>
+              </a:prstGeom>
+            </p:spPr>
+            <p:style>
+              <a:lnRef idx="2">
+                <a:schemeClr val="dk1"/>
+              </a:lnRef>
+              <a:fillRef idx="0">
+                <a:schemeClr val="dk1"/>
+              </a:fillRef>
+              <a:effectRef idx="1">
+                <a:schemeClr val="dk1"/>
+              </a:effectRef>
+              <a:fontRef idx="minor">
+                <a:schemeClr val="tx1"/>
+              </a:fontRef>
+            </p:style>
+          </p:cxnSp>
+          <p:cxnSp>
+            <p:nvCxnSpPr>
+              <p:cNvPr id="57" name="직선 연결선 56">
+                <a:extLst>
+                  <a:ext uri="{FF2B5EF4-FFF2-40B4-BE49-F238E27FC236}">
+                    <a16:creationId xmlns:a16="http://schemas.microsoft.com/office/drawing/2014/main" id="{20D54A27-FAC7-C26F-C6EE-29E2BCE3D812}"/>
+                  </a:ext>
+                </a:extLst>
+              </p:cNvPr>
+              <p:cNvCxnSpPr>
+                <a:cxnSpLocks/>
+              </p:cNvCxnSpPr>
+              <p:nvPr/>
+            </p:nvCxnSpPr>
+            <p:spPr>
+              <a:xfrm>
+                <a:off x="4633913" y="1533525"/>
+                <a:ext cx="1147761" cy="447675"/>
+              </a:xfrm>
+              <a:prstGeom prst="line">
+                <a:avLst/>
+              </a:prstGeom>
+            </p:spPr>
+            <p:style>
+              <a:lnRef idx="2">
+                <a:schemeClr val="dk1"/>
+              </a:lnRef>
+              <a:fillRef idx="0">
+                <a:schemeClr val="dk1"/>
+              </a:fillRef>
+              <a:effectRef idx="1">
+                <a:schemeClr val="dk1"/>
+              </a:effectRef>
+              <a:fontRef idx="minor">
+                <a:schemeClr val="tx1"/>
+              </a:fontRef>
+            </p:style>
+          </p:cxnSp>
+          <p:cxnSp>
+            <p:nvCxnSpPr>
+              <p:cNvPr id="59" name="직선 연결선 58">
+                <a:extLst>
+                  <a:ext uri="{FF2B5EF4-FFF2-40B4-BE49-F238E27FC236}">
+                    <a16:creationId xmlns:a16="http://schemas.microsoft.com/office/drawing/2014/main" id="{908F882D-CF31-3A11-8FCD-5FFBFC6A5CA6}"/>
+                  </a:ext>
+                </a:extLst>
+              </p:cNvPr>
+              <p:cNvCxnSpPr>
+                <a:cxnSpLocks/>
+              </p:cNvCxnSpPr>
+              <p:nvPr/>
+            </p:nvCxnSpPr>
+            <p:spPr>
+              <a:xfrm flipV="1">
+                <a:off x="4633913" y="2995613"/>
+                <a:ext cx="1147761" cy="476249"/>
+              </a:xfrm>
+              <a:prstGeom prst="line">
+                <a:avLst/>
+              </a:prstGeom>
+            </p:spPr>
+            <p:style>
+              <a:lnRef idx="2">
+                <a:schemeClr val="dk1"/>
+              </a:lnRef>
+              <a:fillRef idx="0">
+                <a:schemeClr val="dk1"/>
+              </a:fillRef>
+              <a:effectRef idx="1">
+                <a:schemeClr val="dk1"/>
+              </a:effectRef>
+              <a:fontRef idx="minor">
+                <a:schemeClr val="tx1"/>
+              </a:fontRef>
+            </p:style>
+          </p:cxnSp>
+          <p:cxnSp>
+            <p:nvCxnSpPr>
+              <p:cNvPr id="61" name="직선 연결선 60">
+                <a:extLst>
+                  <a:ext uri="{FF2B5EF4-FFF2-40B4-BE49-F238E27FC236}">
+                    <a16:creationId xmlns:a16="http://schemas.microsoft.com/office/drawing/2014/main" id="{EF4155E8-D5A5-9334-5517-A18AEF7F5997}"/>
+                  </a:ext>
+                </a:extLst>
+              </p:cNvPr>
+              <p:cNvCxnSpPr>
+                <a:cxnSpLocks/>
+              </p:cNvCxnSpPr>
+              <p:nvPr/>
+            </p:nvCxnSpPr>
+            <p:spPr>
+              <a:xfrm>
+                <a:off x="5781674" y="1981200"/>
+                <a:ext cx="0" cy="1014413"/>
+              </a:xfrm>
+              <a:prstGeom prst="line">
+                <a:avLst/>
+              </a:prstGeom>
+            </p:spPr>
+            <p:style>
+              <a:lnRef idx="2">
+                <a:schemeClr val="dk1"/>
+              </a:lnRef>
+              <a:fillRef idx="0">
+                <a:schemeClr val="dk1"/>
+              </a:fillRef>
+              <a:effectRef idx="1">
+                <a:schemeClr val="dk1"/>
+              </a:effectRef>
+              <a:fontRef idx="minor">
+                <a:schemeClr val="tx1"/>
+              </a:fontRef>
+            </p:style>
+          </p:cxnSp>
+        </p:grpSp>
+        <p:sp>
+          <p:nvSpPr>
+            <p:cNvPr id="69" name="TextBox 68">
+              <a:extLst>
+                <a:ext uri="{FF2B5EF4-FFF2-40B4-BE49-F238E27FC236}">
+                  <a16:creationId xmlns:a16="http://schemas.microsoft.com/office/drawing/2014/main" id="{5EFD3819-F7F0-1202-6C36-CDBA3322D241}"/>
+                </a:ext>
+              </a:extLst>
+            </p:cNvPr>
+            <p:cNvSpPr txBox="1"/>
+            <p:nvPr/>
+          </p:nvSpPr>
+          <p:spPr>
+            <a:xfrm>
+              <a:off x="4792256" y="2303740"/>
+              <a:ext cx="927729" cy="369332"/>
+            </a:xfrm>
+            <a:prstGeom prst="rect">
+              <a:avLst/>
+            </a:prstGeom>
+            <a:noFill/>
+          </p:spPr>
+          <p:txBody>
+            <a:bodyPr wrap="square" rtlCol="0">
+              <a:spAutoFit/>
+            </a:bodyPr>
+            <a:lstStyle/>
+            <a:p>
+              <a:pPr algn="ctr"/>
+              <a:r>
+                <a:rPr lang="en-US" altLang="ko-KR" b="1" dirty="0"/>
+                <a:t>Adder</a:t>
+              </a:r>
+              <a:endParaRPr lang="ko-KR" altLang="en-US" b="1" dirty="0"/>
+            </a:p>
+          </p:txBody>
+        </p:sp>
+        <p:cxnSp>
+          <p:nvCxnSpPr>
+            <p:cNvPr id="71" name="직선 화살표 연결선 70">
+              <a:extLst>
+                <a:ext uri="{FF2B5EF4-FFF2-40B4-BE49-F238E27FC236}">
+                  <a16:creationId xmlns:a16="http://schemas.microsoft.com/office/drawing/2014/main" id="{D751C639-FD86-DC17-E91F-F79A0A6ADE53}"/>
+                </a:ext>
+              </a:extLst>
+            </p:cNvPr>
+            <p:cNvCxnSpPr>
+              <a:cxnSpLocks/>
+            </p:cNvCxnSpPr>
+            <p:nvPr/>
+          </p:nvCxnSpPr>
+          <p:spPr>
+            <a:xfrm>
+              <a:off x="3939540" y="1935956"/>
+              <a:ext cx="694372" cy="0"/>
+            </a:xfrm>
+            <a:prstGeom prst="straightConnector1">
+              <a:avLst/>
+            </a:prstGeom>
+            <a:ln>
+              <a:tailEnd type="triangle"/>
+            </a:ln>
+          </p:spPr>
+          <p:style>
+            <a:lnRef idx="2">
+              <a:schemeClr val="dk1"/>
+            </a:lnRef>
+            <a:fillRef idx="0">
+              <a:schemeClr val="dk1"/>
+            </a:fillRef>
+            <a:effectRef idx="1">
+              <a:schemeClr val="dk1"/>
+            </a:effectRef>
+            <a:fontRef idx="minor">
+              <a:schemeClr val="tx1"/>
+            </a:fontRef>
+          </p:style>
+        </p:cxnSp>
+        <p:cxnSp>
+          <p:nvCxnSpPr>
+            <p:cNvPr id="73" name="직선 화살표 연결선 72">
+              <a:extLst>
+                <a:ext uri="{FF2B5EF4-FFF2-40B4-BE49-F238E27FC236}">
+                  <a16:creationId xmlns:a16="http://schemas.microsoft.com/office/drawing/2014/main" id="{1423684C-C704-3B79-EAF5-BDE026CE3A52}"/>
+                </a:ext>
+              </a:extLst>
+            </p:cNvPr>
+            <p:cNvCxnSpPr>
+              <a:cxnSpLocks/>
+            </p:cNvCxnSpPr>
+            <p:nvPr/>
+          </p:nvCxnSpPr>
+          <p:spPr>
+            <a:xfrm>
+              <a:off x="3939540" y="3069431"/>
+              <a:ext cx="694372" cy="0"/>
+            </a:xfrm>
+            <a:prstGeom prst="straightConnector1">
+              <a:avLst/>
+            </a:prstGeom>
+            <a:ln>
+              <a:tailEnd type="triangle"/>
+            </a:ln>
+          </p:spPr>
+          <p:style>
+            <a:lnRef idx="2">
+              <a:schemeClr val="dk1"/>
+            </a:lnRef>
+            <a:fillRef idx="0">
+              <a:schemeClr val="dk1"/>
+            </a:fillRef>
+            <a:effectRef idx="1">
+              <a:schemeClr val="dk1"/>
+            </a:effectRef>
+            <a:fontRef idx="minor">
+              <a:schemeClr val="tx1"/>
+            </a:fontRef>
+          </p:style>
+        </p:cxnSp>
+        <p:cxnSp>
+          <p:nvCxnSpPr>
+            <p:cNvPr id="74" name="직선 화살표 연결선 73">
+              <a:extLst>
+                <a:ext uri="{FF2B5EF4-FFF2-40B4-BE49-F238E27FC236}">
+                  <a16:creationId xmlns:a16="http://schemas.microsoft.com/office/drawing/2014/main" id="{EB6EB424-BB17-6943-AC9B-B67418C01501}"/>
+                </a:ext>
+              </a:extLst>
+            </p:cNvPr>
+            <p:cNvCxnSpPr>
+              <a:cxnSpLocks/>
+            </p:cNvCxnSpPr>
+            <p:nvPr/>
+          </p:nvCxnSpPr>
+          <p:spPr>
+            <a:xfrm>
+              <a:off x="5781674" y="2502694"/>
+              <a:ext cx="694372" cy="0"/>
+            </a:xfrm>
+            <a:prstGeom prst="straightConnector1">
+              <a:avLst/>
+            </a:prstGeom>
+            <a:ln>
+              <a:tailEnd type="triangle"/>
+            </a:ln>
+          </p:spPr>
+          <p:style>
+            <a:lnRef idx="2">
+              <a:schemeClr val="dk1"/>
+            </a:lnRef>
+            <a:fillRef idx="0">
+              <a:schemeClr val="dk1"/>
+            </a:fillRef>
+            <a:effectRef idx="1">
+              <a:schemeClr val="dk1"/>
+            </a:effectRef>
+            <a:fontRef idx="minor">
+              <a:schemeClr val="tx1"/>
+            </a:fontRef>
+          </p:style>
+        </p:cxnSp>
+        <p:sp>
+          <p:nvSpPr>
+            <p:cNvPr id="75" name="TextBox 74">
+              <a:extLst>
+                <a:ext uri="{FF2B5EF4-FFF2-40B4-BE49-F238E27FC236}">
+                  <a16:creationId xmlns:a16="http://schemas.microsoft.com/office/drawing/2014/main" id="{8045F59C-2238-101A-67C5-82BD33EE0382}"/>
+                </a:ext>
+              </a:extLst>
+            </p:cNvPr>
+            <p:cNvSpPr txBox="1"/>
+            <p:nvPr/>
+          </p:nvSpPr>
+          <p:spPr>
+            <a:xfrm>
+              <a:off x="3670461" y="1615440"/>
+              <a:ext cx="538158" cy="276999"/>
+            </a:xfrm>
+            <a:prstGeom prst="rect">
+              <a:avLst/>
+            </a:prstGeom>
+            <a:noFill/>
+          </p:spPr>
+          <p:txBody>
+            <a:bodyPr wrap="square" rtlCol="0">
+              <a:spAutoFit/>
+            </a:bodyPr>
+            <a:lstStyle/>
+            <a:p>
+              <a:pPr algn="ctr"/>
+              <a:r>
+                <a:rPr lang="en-US" altLang="ko-KR" sz="1200" dirty="0" err="1"/>
+                <a:t>i_i0</a:t>
+              </a:r>
+              <a:endParaRPr lang="ko-KR" altLang="en-US" sz="1200" dirty="0"/>
+            </a:p>
+          </p:txBody>
+        </p:sp>
+        <p:sp>
+          <p:nvSpPr>
+            <p:cNvPr id="76" name="TextBox 75">
+              <a:extLst>
+                <a:ext uri="{FF2B5EF4-FFF2-40B4-BE49-F238E27FC236}">
+                  <a16:creationId xmlns:a16="http://schemas.microsoft.com/office/drawing/2014/main" id="{A5D1CF7A-5B51-47A5-48A8-394A1E218074}"/>
+                </a:ext>
+              </a:extLst>
+            </p:cNvPr>
+            <p:cNvSpPr txBox="1"/>
+            <p:nvPr/>
+          </p:nvSpPr>
+          <p:spPr>
+            <a:xfrm>
+              <a:off x="3670461" y="2718614"/>
+              <a:ext cx="538158" cy="276999"/>
+            </a:xfrm>
+            <a:prstGeom prst="rect">
+              <a:avLst/>
+            </a:prstGeom>
+            <a:noFill/>
+          </p:spPr>
+          <p:txBody>
+            <a:bodyPr wrap="square" rtlCol="0">
+              <a:spAutoFit/>
+            </a:bodyPr>
+            <a:lstStyle/>
+            <a:p>
+              <a:pPr algn="ctr"/>
+              <a:r>
+                <a:rPr lang="en-US" altLang="ko-KR" sz="1200" dirty="0" err="1"/>
+                <a:t>i_i1</a:t>
+              </a:r>
+              <a:endParaRPr lang="ko-KR" altLang="en-US" sz="1200" dirty="0"/>
+            </a:p>
+          </p:txBody>
+        </p:sp>
+        <p:sp>
+          <p:nvSpPr>
+            <p:cNvPr id="77" name="TextBox 76">
+              <a:extLst>
+                <a:ext uri="{FF2B5EF4-FFF2-40B4-BE49-F238E27FC236}">
+                  <a16:creationId xmlns:a16="http://schemas.microsoft.com/office/drawing/2014/main" id="{76032A88-7F4C-BFCB-A04E-DE039C36CFDB}"/>
+                </a:ext>
+              </a:extLst>
+            </p:cNvPr>
+            <p:cNvSpPr txBox="1"/>
+            <p:nvPr/>
+          </p:nvSpPr>
+          <p:spPr>
+            <a:xfrm>
+              <a:off x="5829421" y="2165240"/>
+              <a:ext cx="538158" cy="276999"/>
+            </a:xfrm>
+            <a:prstGeom prst="rect">
+              <a:avLst/>
+            </a:prstGeom>
+            <a:noFill/>
+          </p:spPr>
+          <p:txBody>
+            <a:bodyPr wrap="square" rtlCol="0">
+              <a:spAutoFit/>
+            </a:bodyPr>
+            <a:lstStyle/>
+            <a:p>
+              <a:pPr algn="ctr"/>
+              <a:r>
+                <a:rPr lang="en-US" altLang="ko-KR" sz="1200" dirty="0" err="1"/>
+                <a:t>o_o</a:t>
+              </a:r>
+              <a:endParaRPr lang="ko-KR" altLang="en-US" sz="1200" dirty="0"/>
+            </a:p>
+          </p:txBody>
+        </p:sp>
+      </p:grpSp>
+      <p:grpSp>
+        <p:nvGrpSpPr>
+          <p:cNvPr id="99" name="그룹 98">
+            <a:extLst>
+              <a:ext uri="{FF2B5EF4-FFF2-40B4-BE49-F238E27FC236}">
+                <a16:creationId xmlns:a16="http://schemas.microsoft.com/office/drawing/2014/main" id="{208A68CC-9D93-2E6F-4FA6-0B5072A65062}"/>
+              </a:ext>
+            </a:extLst>
+          </p:cNvPr>
+          <p:cNvGrpSpPr/>
+          <p:nvPr/>
+        </p:nvGrpSpPr>
+        <p:grpSpPr>
+          <a:xfrm>
+            <a:off x="2032161" y="2912745"/>
+            <a:ext cx="2853328" cy="2306955"/>
+            <a:chOff x="2032161" y="2912745"/>
+            <a:chExt cx="2853328" cy="2306955"/>
+          </a:xfrm>
+        </p:grpSpPr>
+        <p:grpSp>
+          <p:nvGrpSpPr>
+            <p:cNvPr id="79" name="그룹 78">
+              <a:extLst>
+                <a:ext uri="{FF2B5EF4-FFF2-40B4-BE49-F238E27FC236}">
+                  <a16:creationId xmlns:a16="http://schemas.microsoft.com/office/drawing/2014/main" id="{5DD36CEB-8DB7-2730-2AFD-5836DF2CA63E}"/>
+                </a:ext>
+              </a:extLst>
+            </p:cNvPr>
+            <p:cNvGrpSpPr/>
+            <p:nvPr/>
+          </p:nvGrpSpPr>
+          <p:grpSpPr>
+            <a:xfrm>
+              <a:off x="2032161" y="2912745"/>
+              <a:ext cx="2853328" cy="2093505"/>
+              <a:chOff x="3670461" y="1533525"/>
+              <a:chExt cx="2853328" cy="2093505"/>
+            </a:xfrm>
+          </p:grpSpPr>
+          <p:grpSp>
+            <p:nvGrpSpPr>
+              <p:cNvPr id="80" name="그룹 79">
+                <a:extLst>
+                  <a:ext uri="{FF2B5EF4-FFF2-40B4-BE49-F238E27FC236}">
+                    <a16:creationId xmlns:a16="http://schemas.microsoft.com/office/drawing/2014/main" id="{CFAC81A3-F57A-3FDB-8485-807D41CFB1B5}"/>
+                  </a:ext>
+                </a:extLst>
+              </p:cNvPr>
+              <p:cNvGrpSpPr/>
+              <p:nvPr/>
+            </p:nvGrpSpPr>
+            <p:grpSpPr>
+              <a:xfrm>
+                <a:off x="4633913" y="1533525"/>
+                <a:ext cx="1147761" cy="1938337"/>
+                <a:chOff x="4633913" y="1533525"/>
+                <a:chExt cx="1147761" cy="1938337"/>
+              </a:xfrm>
+            </p:grpSpPr>
+            <p:cxnSp>
+              <p:nvCxnSpPr>
+                <p:cNvPr id="88" name="직선 연결선 87">
+                  <a:extLst>
+                    <a:ext uri="{FF2B5EF4-FFF2-40B4-BE49-F238E27FC236}">
+                      <a16:creationId xmlns:a16="http://schemas.microsoft.com/office/drawing/2014/main" id="{410B95F3-441A-1135-07B9-0ADC1977311C}"/>
+                    </a:ext>
+                  </a:extLst>
+                </p:cNvPr>
+                <p:cNvCxnSpPr>
+                  <a:cxnSpLocks/>
+                </p:cNvCxnSpPr>
+                <p:nvPr/>
+              </p:nvCxnSpPr>
+              <p:spPr>
+                <a:xfrm>
+                  <a:off x="4633913" y="1533525"/>
+                  <a:ext cx="0" cy="804862"/>
+                </a:xfrm>
+                <a:prstGeom prst="line">
+                  <a:avLst/>
+                </a:prstGeom>
+              </p:spPr>
+              <p:style>
+                <a:lnRef idx="2">
+                  <a:schemeClr val="dk1"/>
+                </a:lnRef>
+                <a:fillRef idx="0">
+                  <a:schemeClr val="dk1"/>
+                </a:fillRef>
+                <a:effectRef idx="1">
+                  <a:schemeClr val="dk1"/>
+                </a:effectRef>
+                <a:fontRef idx="minor">
+                  <a:schemeClr val="tx1"/>
+                </a:fontRef>
+              </p:style>
+            </p:cxnSp>
+            <p:cxnSp>
+              <p:nvCxnSpPr>
+                <p:cNvPr id="89" name="직선 연결선 88">
+                  <a:extLst>
+                    <a:ext uri="{FF2B5EF4-FFF2-40B4-BE49-F238E27FC236}">
+                      <a16:creationId xmlns:a16="http://schemas.microsoft.com/office/drawing/2014/main" id="{6A3A4024-A279-2BDB-E9C6-7FA74E567A98}"/>
+                    </a:ext>
+                  </a:extLst>
+                </p:cNvPr>
+                <p:cNvCxnSpPr>
+                  <a:cxnSpLocks/>
+                </p:cNvCxnSpPr>
+                <p:nvPr/>
+              </p:nvCxnSpPr>
+              <p:spPr>
+                <a:xfrm>
+                  <a:off x="4633913" y="2667000"/>
+                  <a:ext cx="0" cy="804862"/>
+                </a:xfrm>
+                <a:prstGeom prst="line">
+                  <a:avLst/>
+                </a:prstGeom>
+              </p:spPr>
+              <p:style>
+                <a:lnRef idx="2">
+                  <a:schemeClr val="dk1"/>
+                </a:lnRef>
+                <a:fillRef idx="0">
+                  <a:schemeClr val="dk1"/>
+                </a:fillRef>
+                <a:effectRef idx="1">
+                  <a:schemeClr val="dk1"/>
+                </a:effectRef>
+                <a:fontRef idx="minor">
+                  <a:schemeClr val="tx1"/>
+                </a:fontRef>
+              </p:style>
+            </p:cxnSp>
+            <p:cxnSp>
+              <p:nvCxnSpPr>
+                <p:cNvPr id="90" name="직선 연결선 89">
+                  <a:extLst>
+                    <a:ext uri="{FF2B5EF4-FFF2-40B4-BE49-F238E27FC236}">
+                      <a16:creationId xmlns:a16="http://schemas.microsoft.com/office/drawing/2014/main" id="{B71C1663-7353-4472-B078-E7A554B93F42}"/>
+                    </a:ext>
+                  </a:extLst>
+                </p:cNvPr>
+                <p:cNvCxnSpPr>
+                  <a:cxnSpLocks/>
+                </p:cNvCxnSpPr>
+                <p:nvPr/>
+              </p:nvCxnSpPr>
+              <p:spPr>
+                <a:xfrm>
+                  <a:off x="4633913" y="2338387"/>
+                  <a:ext cx="158343" cy="164307"/>
+                </a:xfrm>
+                <a:prstGeom prst="line">
+                  <a:avLst/>
+                </a:prstGeom>
+              </p:spPr>
+              <p:style>
+                <a:lnRef idx="2">
+                  <a:schemeClr val="dk1"/>
+                </a:lnRef>
+                <a:fillRef idx="0">
+                  <a:schemeClr val="dk1"/>
+                </a:fillRef>
+                <a:effectRef idx="1">
+                  <a:schemeClr val="dk1"/>
+                </a:effectRef>
+                <a:fontRef idx="minor">
+                  <a:schemeClr val="tx1"/>
+                </a:fontRef>
+              </p:style>
+            </p:cxnSp>
+            <p:cxnSp>
+              <p:nvCxnSpPr>
+                <p:cNvPr id="91" name="직선 연결선 90">
+                  <a:extLst>
+                    <a:ext uri="{FF2B5EF4-FFF2-40B4-BE49-F238E27FC236}">
+                      <a16:creationId xmlns:a16="http://schemas.microsoft.com/office/drawing/2014/main" id="{02276713-25E2-9A58-3F3F-06E0B9906031}"/>
+                    </a:ext>
+                  </a:extLst>
+                </p:cNvPr>
+                <p:cNvCxnSpPr>
+                  <a:cxnSpLocks/>
+                </p:cNvCxnSpPr>
+                <p:nvPr/>
+              </p:nvCxnSpPr>
+              <p:spPr>
+                <a:xfrm flipV="1">
+                  <a:off x="4633913" y="2502694"/>
+                  <a:ext cx="158343" cy="164306"/>
+                </a:xfrm>
+                <a:prstGeom prst="line">
+                  <a:avLst/>
+                </a:prstGeom>
+              </p:spPr>
+              <p:style>
+                <a:lnRef idx="2">
+                  <a:schemeClr val="dk1"/>
+                </a:lnRef>
+                <a:fillRef idx="0">
+                  <a:schemeClr val="dk1"/>
+                </a:fillRef>
+                <a:effectRef idx="1">
+                  <a:schemeClr val="dk1"/>
+                </a:effectRef>
+                <a:fontRef idx="minor">
+                  <a:schemeClr val="tx1"/>
+                </a:fontRef>
+              </p:style>
+            </p:cxnSp>
+            <p:cxnSp>
+              <p:nvCxnSpPr>
+                <p:cNvPr id="92" name="직선 연결선 91">
+                  <a:extLst>
+                    <a:ext uri="{FF2B5EF4-FFF2-40B4-BE49-F238E27FC236}">
+                      <a16:creationId xmlns:a16="http://schemas.microsoft.com/office/drawing/2014/main" id="{AAF327B1-F8EF-17F4-16F0-9122C638DC76}"/>
+                    </a:ext>
+                  </a:extLst>
+                </p:cNvPr>
+                <p:cNvCxnSpPr>
+                  <a:cxnSpLocks/>
+                </p:cNvCxnSpPr>
+                <p:nvPr/>
+              </p:nvCxnSpPr>
+              <p:spPr>
+                <a:xfrm>
+                  <a:off x="4633913" y="1533525"/>
+                  <a:ext cx="1147761" cy="447675"/>
+                </a:xfrm>
+                <a:prstGeom prst="line">
+                  <a:avLst/>
+                </a:prstGeom>
+              </p:spPr>
+              <p:style>
+                <a:lnRef idx="2">
+                  <a:schemeClr val="dk1"/>
+                </a:lnRef>
+                <a:fillRef idx="0">
+                  <a:schemeClr val="dk1"/>
+                </a:fillRef>
+                <a:effectRef idx="1">
+                  <a:schemeClr val="dk1"/>
+                </a:effectRef>
+                <a:fontRef idx="minor">
+                  <a:schemeClr val="tx1"/>
+                </a:fontRef>
+              </p:style>
+            </p:cxnSp>
+            <p:cxnSp>
+              <p:nvCxnSpPr>
+                <p:cNvPr id="93" name="직선 연결선 92">
+                  <a:extLst>
+                    <a:ext uri="{FF2B5EF4-FFF2-40B4-BE49-F238E27FC236}">
+                      <a16:creationId xmlns:a16="http://schemas.microsoft.com/office/drawing/2014/main" id="{816F98C0-C9CB-330D-E624-18BF5D90ED72}"/>
+                    </a:ext>
+                  </a:extLst>
+                </p:cNvPr>
+                <p:cNvCxnSpPr>
+                  <a:cxnSpLocks/>
+                </p:cNvCxnSpPr>
+                <p:nvPr/>
+              </p:nvCxnSpPr>
+              <p:spPr>
+                <a:xfrm flipV="1">
+                  <a:off x="4633913" y="2995613"/>
+                  <a:ext cx="1147761" cy="476249"/>
+                </a:xfrm>
+                <a:prstGeom prst="line">
+                  <a:avLst/>
+                </a:prstGeom>
+              </p:spPr>
+              <p:style>
+                <a:lnRef idx="2">
+                  <a:schemeClr val="dk1"/>
+                </a:lnRef>
+                <a:fillRef idx="0">
+                  <a:schemeClr val="dk1"/>
+                </a:fillRef>
+                <a:effectRef idx="1">
+                  <a:schemeClr val="dk1"/>
+                </a:effectRef>
+                <a:fontRef idx="minor">
+                  <a:schemeClr val="tx1"/>
+                </a:fontRef>
+              </p:style>
+            </p:cxnSp>
+            <p:cxnSp>
+              <p:nvCxnSpPr>
+                <p:cNvPr id="94" name="직선 연결선 93">
+                  <a:extLst>
+                    <a:ext uri="{FF2B5EF4-FFF2-40B4-BE49-F238E27FC236}">
+                      <a16:creationId xmlns:a16="http://schemas.microsoft.com/office/drawing/2014/main" id="{E29C9405-B495-4D17-ADD6-7E7234F15939}"/>
+                    </a:ext>
+                  </a:extLst>
+                </p:cNvPr>
+                <p:cNvCxnSpPr>
+                  <a:cxnSpLocks/>
+                </p:cNvCxnSpPr>
+                <p:nvPr/>
+              </p:nvCxnSpPr>
+              <p:spPr>
+                <a:xfrm>
+                  <a:off x="5781674" y="1981200"/>
+                  <a:ext cx="0" cy="1014413"/>
+                </a:xfrm>
+                <a:prstGeom prst="line">
+                  <a:avLst/>
+                </a:prstGeom>
+              </p:spPr>
+              <p:style>
+                <a:lnRef idx="2">
+                  <a:schemeClr val="dk1"/>
+                </a:lnRef>
+                <a:fillRef idx="0">
+                  <a:schemeClr val="dk1"/>
+                </a:fillRef>
+                <a:effectRef idx="1">
+                  <a:schemeClr val="dk1"/>
+                </a:effectRef>
+                <a:fontRef idx="minor">
+                  <a:schemeClr val="tx1"/>
+                </a:fontRef>
+              </p:style>
+            </p:cxnSp>
+          </p:grpSp>
+          <p:sp>
+            <p:nvSpPr>
+              <p:cNvPr id="81" name="TextBox 80">
+                <a:extLst>
+                  <a:ext uri="{FF2B5EF4-FFF2-40B4-BE49-F238E27FC236}">
+                    <a16:creationId xmlns:a16="http://schemas.microsoft.com/office/drawing/2014/main" id="{7B33DA8E-EECA-E070-F505-74F98B73E532}"/>
+                  </a:ext>
+                </a:extLst>
+              </p:cNvPr>
+              <p:cNvSpPr txBox="1"/>
+              <p:nvPr/>
+            </p:nvSpPr>
+            <p:spPr>
+              <a:xfrm>
+                <a:off x="4792256" y="2303740"/>
+                <a:ext cx="927729" cy="369332"/>
+              </a:xfrm>
+              <a:prstGeom prst="rect">
+                <a:avLst/>
+              </a:prstGeom>
+              <a:noFill/>
+            </p:spPr>
+            <p:txBody>
+              <a:bodyPr wrap="square" rtlCol="0">
+                <a:spAutoFit/>
+              </a:bodyPr>
+              <a:lstStyle/>
+              <a:p>
+                <a:pPr algn="ctr"/>
+                <a:r>
+                  <a:rPr lang="en-US" altLang="ko-KR" b="1" dirty="0"/>
+                  <a:t>ALU</a:t>
+                </a:r>
+                <a:endParaRPr lang="ko-KR" altLang="en-US" b="1" dirty="0"/>
+              </a:p>
+            </p:txBody>
+          </p:sp>
+          <p:cxnSp>
+            <p:nvCxnSpPr>
+              <p:cNvPr id="82" name="직선 화살표 연결선 81">
+                <a:extLst>
+                  <a:ext uri="{FF2B5EF4-FFF2-40B4-BE49-F238E27FC236}">
+                    <a16:creationId xmlns:a16="http://schemas.microsoft.com/office/drawing/2014/main" id="{6D8E5DBC-1B07-8F24-EC3F-B690FB9E5902}"/>
+                  </a:ext>
+                </a:extLst>
+              </p:cNvPr>
+              <p:cNvCxnSpPr>
+                <a:cxnSpLocks/>
+              </p:cNvCxnSpPr>
+              <p:nvPr/>
+            </p:nvCxnSpPr>
+            <p:spPr>
+              <a:xfrm>
+                <a:off x="3939540" y="1935956"/>
+                <a:ext cx="694372" cy="0"/>
+              </a:xfrm>
+              <a:prstGeom prst="straightConnector1">
+                <a:avLst/>
+              </a:prstGeom>
+              <a:ln>
+                <a:tailEnd type="triangle"/>
+              </a:ln>
+            </p:spPr>
+            <p:style>
+              <a:lnRef idx="2">
+                <a:schemeClr val="dk1"/>
+              </a:lnRef>
+              <a:fillRef idx="0">
+                <a:schemeClr val="dk1"/>
+              </a:fillRef>
+              <a:effectRef idx="1">
+                <a:schemeClr val="dk1"/>
+              </a:effectRef>
+              <a:fontRef idx="minor">
+                <a:schemeClr val="tx1"/>
+              </a:fontRef>
+            </p:style>
+          </p:cxnSp>
+          <p:cxnSp>
+            <p:nvCxnSpPr>
+              <p:cNvPr id="83" name="직선 화살표 연결선 82">
+                <a:extLst>
+                  <a:ext uri="{FF2B5EF4-FFF2-40B4-BE49-F238E27FC236}">
+                    <a16:creationId xmlns:a16="http://schemas.microsoft.com/office/drawing/2014/main" id="{E927408C-03BA-D356-90BC-496AB5459999}"/>
+                  </a:ext>
+                </a:extLst>
+              </p:cNvPr>
+              <p:cNvCxnSpPr>
+                <a:cxnSpLocks/>
+              </p:cNvCxnSpPr>
+              <p:nvPr/>
+            </p:nvCxnSpPr>
+            <p:spPr>
+              <a:xfrm>
+                <a:off x="3939540" y="3069431"/>
+                <a:ext cx="694372" cy="0"/>
+              </a:xfrm>
+              <a:prstGeom prst="straightConnector1">
+                <a:avLst/>
+              </a:prstGeom>
+              <a:ln>
+                <a:tailEnd type="triangle"/>
+              </a:ln>
+            </p:spPr>
+            <p:style>
+              <a:lnRef idx="2">
+                <a:schemeClr val="dk1"/>
+              </a:lnRef>
+              <a:fillRef idx="0">
+                <a:schemeClr val="dk1"/>
+              </a:fillRef>
+              <a:effectRef idx="1">
+                <a:schemeClr val="dk1"/>
+              </a:effectRef>
+              <a:fontRef idx="minor">
+                <a:schemeClr val="tx1"/>
+              </a:fontRef>
+            </p:style>
+          </p:cxnSp>
+          <p:cxnSp>
+            <p:nvCxnSpPr>
+              <p:cNvPr id="84" name="직선 화살표 연결선 83">
+                <a:extLst>
+                  <a:ext uri="{FF2B5EF4-FFF2-40B4-BE49-F238E27FC236}">
+                    <a16:creationId xmlns:a16="http://schemas.microsoft.com/office/drawing/2014/main" id="{F40300D2-1DA4-ED82-5873-C6EEFF30DDA7}"/>
+                  </a:ext>
+                </a:extLst>
+              </p:cNvPr>
+              <p:cNvCxnSpPr>
+                <a:cxnSpLocks/>
+              </p:cNvCxnSpPr>
+              <p:nvPr/>
+            </p:nvCxnSpPr>
+            <p:spPr>
+              <a:xfrm>
+                <a:off x="5781674" y="2502694"/>
+                <a:ext cx="694372" cy="0"/>
+              </a:xfrm>
+              <a:prstGeom prst="straightConnector1">
+                <a:avLst/>
+              </a:prstGeom>
+              <a:ln>
+                <a:tailEnd type="triangle"/>
+              </a:ln>
+            </p:spPr>
+            <p:style>
+              <a:lnRef idx="2">
+                <a:schemeClr val="dk1"/>
+              </a:lnRef>
+              <a:fillRef idx="0">
+                <a:schemeClr val="dk1"/>
+              </a:fillRef>
+              <a:effectRef idx="1">
+                <a:schemeClr val="dk1"/>
+              </a:effectRef>
+              <a:fontRef idx="minor">
+                <a:schemeClr val="tx1"/>
+              </a:fontRef>
+            </p:style>
+          </p:cxnSp>
+          <p:sp>
+            <p:nvSpPr>
+              <p:cNvPr id="85" name="TextBox 84">
+                <a:extLst>
+                  <a:ext uri="{FF2B5EF4-FFF2-40B4-BE49-F238E27FC236}">
+                    <a16:creationId xmlns:a16="http://schemas.microsoft.com/office/drawing/2014/main" id="{91DA96CC-8136-949B-3C68-2CEC0B0687FB}"/>
+                  </a:ext>
+                </a:extLst>
+              </p:cNvPr>
+              <p:cNvSpPr txBox="1"/>
+              <p:nvPr/>
+            </p:nvSpPr>
+            <p:spPr>
+              <a:xfrm>
+                <a:off x="3670461" y="1615440"/>
+                <a:ext cx="538158" cy="276999"/>
+              </a:xfrm>
+              <a:prstGeom prst="rect">
+                <a:avLst/>
+              </a:prstGeom>
+              <a:noFill/>
+            </p:spPr>
+            <p:txBody>
+              <a:bodyPr wrap="square" rtlCol="0">
+                <a:spAutoFit/>
+              </a:bodyPr>
+              <a:lstStyle/>
+              <a:p>
+                <a:pPr algn="ctr"/>
+                <a:r>
+                  <a:rPr lang="en-US" altLang="ko-KR" sz="1200" dirty="0" err="1"/>
+                  <a:t>i_in0</a:t>
+                </a:r>
+                <a:endParaRPr lang="ko-KR" altLang="en-US" sz="1200" dirty="0"/>
+              </a:p>
+            </p:txBody>
+          </p:sp>
+          <p:sp>
+            <p:nvSpPr>
+              <p:cNvPr id="86" name="TextBox 85">
+                <a:extLst>
+                  <a:ext uri="{FF2B5EF4-FFF2-40B4-BE49-F238E27FC236}">
+                    <a16:creationId xmlns:a16="http://schemas.microsoft.com/office/drawing/2014/main" id="{C552D4C9-148E-D21E-FFEE-6A55DFE74A46}"/>
+                  </a:ext>
+                </a:extLst>
+              </p:cNvPr>
+              <p:cNvSpPr txBox="1"/>
+              <p:nvPr/>
+            </p:nvSpPr>
+            <p:spPr>
+              <a:xfrm>
+                <a:off x="3670461" y="2718614"/>
+                <a:ext cx="538158" cy="276999"/>
+              </a:xfrm>
+              <a:prstGeom prst="rect">
+                <a:avLst/>
+              </a:prstGeom>
+              <a:noFill/>
+            </p:spPr>
+            <p:txBody>
+              <a:bodyPr wrap="square" rtlCol="0">
+                <a:spAutoFit/>
+              </a:bodyPr>
+              <a:lstStyle/>
+              <a:p>
+                <a:pPr algn="ctr"/>
+                <a:r>
+                  <a:rPr lang="en-US" altLang="ko-KR" sz="1200" dirty="0" err="1"/>
+                  <a:t>i_in1</a:t>
+                </a:r>
+                <a:endParaRPr lang="ko-KR" altLang="en-US" sz="1200" dirty="0"/>
+              </a:p>
+            </p:txBody>
+          </p:sp>
+          <p:sp>
+            <p:nvSpPr>
+              <p:cNvPr id="87" name="TextBox 86">
+                <a:extLst>
+                  <a:ext uri="{FF2B5EF4-FFF2-40B4-BE49-F238E27FC236}">
+                    <a16:creationId xmlns:a16="http://schemas.microsoft.com/office/drawing/2014/main" id="{00DED68F-223B-E8DF-0CB3-37F40C36DBDF}"/>
+                  </a:ext>
+                </a:extLst>
+              </p:cNvPr>
+              <p:cNvSpPr txBox="1"/>
+              <p:nvPr/>
+            </p:nvSpPr>
+            <p:spPr>
+              <a:xfrm>
+                <a:off x="5829420" y="2226240"/>
+                <a:ext cx="694369" cy="276999"/>
+              </a:xfrm>
+              <a:prstGeom prst="rect">
+                <a:avLst/>
+              </a:prstGeom>
+              <a:noFill/>
+            </p:spPr>
+            <p:txBody>
+              <a:bodyPr wrap="square" rtlCol="0">
+                <a:spAutoFit/>
+              </a:bodyPr>
+              <a:lstStyle/>
+              <a:p>
+                <a:pPr algn="ctr"/>
+                <a:r>
+                  <a:rPr lang="en-US" altLang="ko-KR" sz="1200" dirty="0" err="1"/>
+                  <a:t>o_out</a:t>
+                </a:r>
+                <a:endParaRPr lang="ko-KR" altLang="en-US" sz="1200" dirty="0"/>
+              </a:p>
+            </p:txBody>
+          </p:sp>
+          <p:sp>
+            <p:nvSpPr>
+              <p:cNvPr id="98" name="TextBox 97">
+                <a:extLst>
+                  <a:ext uri="{FF2B5EF4-FFF2-40B4-BE49-F238E27FC236}">
+                    <a16:creationId xmlns:a16="http://schemas.microsoft.com/office/drawing/2014/main" id="{C5030A70-3647-0212-F9A1-A61460C37EB6}"/>
+                  </a:ext>
+                </a:extLst>
+              </p:cNvPr>
+              <p:cNvSpPr txBox="1"/>
+              <p:nvPr/>
+            </p:nvSpPr>
+            <p:spPr>
+              <a:xfrm>
+                <a:off x="5269865" y="3350031"/>
+                <a:ext cx="694369" cy="276999"/>
+              </a:xfrm>
+              <a:prstGeom prst="rect">
+                <a:avLst/>
+              </a:prstGeom>
+              <a:noFill/>
+            </p:spPr>
+            <p:txBody>
+              <a:bodyPr wrap="square" rtlCol="0">
+                <a:spAutoFit/>
+              </a:bodyPr>
+              <a:lstStyle/>
+              <a:p>
+                <a:pPr algn="ctr"/>
+                <a:r>
+                  <a:rPr lang="en-US" altLang="ko-KR" sz="1200" dirty="0" err="1"/>
+                  <a:t>i_aluop</a:t>
+                </a:r>
+                <a:endParaRPr lang="ko-KR" altLang="en-US" sz="1200" dirty="0"/>
+              </a:p>
+            </p:txBody>
+          </p:sp>
+          <p:cxnSp>
+            <p:nvCxnSpPr>
+              <p:cNvPr id="100" name="직선 화살표 연결선 99">
+                <a:extLst>
+                  <a:ext uri="{FF2B5EF4-FFF2-40B4-BE49-F238E27FC236}">
+                    <a16:creationId xmlns:a16="http://schemas.microsoft.com/office/drawing/2014/main" id="{7BF76B3B-2D35-212A-A984-7E72E4F29B32}"/>
+                  </a:ext>
+                </a:extLst>
+              </p:cNvPr>
+              <p:cNvCxnSpPr>
+                <a:cxnSpLocks/>
+              </p:cNvCxnSpPr>
+              <p:nvPr/>
+            </p:nvCxnSpPr>
+            <p:spPr>
+              <a:xfrm>
+                <a:off x="5781674" y="2093119"/>
+                <a:ext cx="694372" cy="0"/>
+              </a:xfrm>
+              <a:prstGeom prst="straightConnector1">
+                <a:avLst/>
+              </a:prstGeom>
+              <a:ln>
+                <a:tailEnd type="triangle"/>
+              </a:ln>
+            </p:spPr>
+            <p:style>
+              <a:lnRef idx="2">
+                <a:schemeClr val="dk1"/>
+              </a:lnRef>
+              <a:fillRef idx="0">
+                <a:schemeClr val="dk1"/>
+              </a:fillRef>
+              <a:effectRef idx="1">
+                <a:schemeClr val="dk1"/>
+              </a:effectRef>
+              <a:fontRef idx="minor">
+                <a:schemeClr val="tx1"/>
+              </a:fontRef>
+            </p:style>
+          </p:cxnSp>
+          <p:sp>
+            <p:nvSpPr>
+              <p:cNvPr id="101" name="TextBox 100">
+                <a:extLst>
+                  <a:ext uri="{FF2B5EF4-FFF2-40B4-BE49-F238E27FC236}">
+                    <a16:creationId xmlns:a16="http://schemas.microsoft.com/office/drawing/2014/main" id="{54CFF25E-6F4C-B23E-CAC4-AAFE9609F505}"/>
+                  </a:ext>
+                </a:extLst>
+              </p:cNvPr>
+              <p:cNvSpPr txBox="1"/>
+              <p:nvPr/>
+            </p:nvSpPr>
+            <p:spPr>
+              <a:xfrm>
+                <a:off x="5829420" y="1816120"/>
+                <a:ext cx="694369" cy="276999"/>
+              </a:xfrm>
+              <a:prstGeom prst="rect">
+                <a:avLst/>
+              </a:prstGeom>
+              <a:noFill/>
+            </p:spPr>
+            <p:txBody>
+              <a:bodyPr wrap="square" rtlCol="0">
+                <a:spAutoFit/>
+              </a:bodyPr>
+              <a:lstStyle/>
+              <a:p>
+                <a:pPr algn="ctr"/>
+                <a:r>
+                  <a:rPr lang="en-US" altLang="ko-KR" sz="1200" dirty="0" err="1"/>
+                  <a:t>o_zero</a:t>
+                </a:r>
+                <a:endParaRPr lang="ko-KR" altLang="en-US" sz="1200" dirty="0"/>
+              </a:p>
+            </p:txBody>
+          </p:sp>
+        </p:grpSp>
+        <p:cxnSp>
+          <p:nvCxnSpPr>
+            <p:cNvPr id="96" name="직선 화살표 연결선 95">
+              <a:extLst>
+                <a:ext uri="{FF2B5EF4-FFF2-40B4-BE49-F238E27FC236}">
+                  <a16:creationId xmlns:a16="http://schemas.microsoft.com/office/drawing/2014/main" id="{366B3B3C-B962-1A7D-BEE6-22C16D45619E}"/>
+                </a:ext>
+              </a:extLst>
+            </p:cNvPr>
+            <p:cNvCxnSpPr>
+              <a:cxnSpLocks/>
+            </p:cNvCxnSpPr>
+            <p:nvPr/>
+          </p:nvCxnSpPr>
+          <p:spPr>
+            <a:xfrm flipV="1">
+              <a:off x="3631565" y="4596130"/>
+              <a:ext cx="0" cy="623570"/>
+            </a:xfrm>
+            <a:prstGeom prst="straightConnector1">
+              <a:avLst/>
+            </a:prstGeom>
+            <a:ln>
+              <a:tailEnd type="triangle"/>
+            </a:ln>
+          </p:spPr>
+          <p:style>
+            <a:lnRef idx="2">
+              <a:schemeClr val="dk1"/>
+            </a:lnRef>
+            <a:fillRef idx="0">
+              <a:schemeClr val="dk1"/>
+            </a:fillRef>
+            <a:effectRef idx="1">
+              <a:schemeClr val="dk1"/>
+            </a:effectRef>
+            <a:fontRef idx="minor">
+              <a:schemeClr val="tx1"/>
+            </a:fontRef>
+          </p:style>
+        </p:cxnSp>
+      </p:grpSp>
+      <p:grpSp>
+        <p:nvGrpSpPr>
+          <p:cNvPr id="115" name="그룹 114">
+            <a:extLst>
+              <a:ext uri="{FF2B5EF4-FFF2-40B4-BE49-F238E27FC236}">
+                <a16:creationId xmlns:a16="http://schemas.microsoft.com/office/drawing/2014/main" id="{3FC5B017-E6F2-3670-ADB1-FC5DC414827D}"/>
+              </a:ext>
+            </a:extLst>
+          </p:cNvPr>
+          <p:cNvGrpSpPr/>
+          <p:nvPr/>
+        </p:nvGrpSpPr>
+        <p:grpSpPr>
+          <a:xfrm>
+            <a:off x="5736156" y="526812"/>
+            <a:ext cx="3030740" cy="2252087"/>
+            <a:chOff x="5736156" y="526812"/>
+            <a:chExt cx="3030740" cy="2252087"/>
+          </a:xfrm>
+        </p:grpSpPr>
+        <p:grpSp>
+          <p:nvGrpSpPr>
+            <p:cNvPr id="108" name="그룹 107">
+              <a:extLst>
+                <a:ext uri="{FF2B5EF4-FFF2-40B4-BE49-F238E27FC236}">
+                  <a16:creationId xmlns:a16="http://schemas.microsoft.com/office/drawing/2014/main" id="{9EEB1D1A-FB73-158B-1420-709CE8DED42F}"/>
+                </a:ext>
+              </a:extLst>
+            </p:cNvPr>
+            <p:cNvGrpSpPr/>
+            <p:nvPr/>
+          </p:nvGrpSpPr>
+          <p:grpSpPr>
+            <a:xfrm>
+              <a:off x="5827164" y="526812"/>
+              <a:ext cx="2900044" cy="1753870"/>
+              <a:chOff x="5576252" y="1606550"/>
+              <a:chExt cx="2900044" cy="1753870"/>
+            </a:xfrm>
+          </p:grpSpPr>
+          <p:sp>
+            <p:nvSpPr>
+              <p:cNvPr id="102" name="직사각형 101">
+                <a:extLst>
+                  <a:ext uri="{FF2B5EF4-FFF2-40B4-BE49-F238E27FC236}">
+                    <a16:creationId xmlns:a16="http://schemas.microsoft.com/office/drawing/2014/main" id="{4F3CDC03-A1B9-2C80-3280-F22B08D1C889}"/>
+                  </a:ext>
+                </a:extLst>
+              </p:cNvPr>
+              <p:cNvSpPr/>
+              <p:nvPr/>
+            </p:nvSpPr>
+            <p:spPr>
+              <a:xfrm>
+                <a:off x="6350000" y="1606550"/>
+                <a:ext cx="1352548" cy="1753870"/>
+              </a:xfrm>
+              <a:prstGeom prst="rect">
+                <a:avLst/>
+              </a:prstGeom>
+              <a:noFill/>
+              <a:ln>
+                <a:solidFill>
+                  <a:schemeClr val="tx1"/>
+                </a:solidFill>
+              </a:ln>
+            </p:spPr>
+            <p:style>
+              <a:lnRef idx="2">
+                <a:schemeClr val="accent1">
+                  <a:shade val="15000"/>
+                </a:schemeClr>
+              </a:lnRef>
+              <a:fillRef idx="1">
+                <a:schemeClr val="accent1"/>
+              </a:fillRef>
+              <a:effectRef idx="0">
+                <a:schemeClr val="accent1"/>
+              </a:effectRef>
+              <a:fontRef idx="minor">
+                <a:schemeClr val="lt1"/>
+              </a:fontRef>
+            </p:style>
+            <p:txBody>
+              <a:bodyPr rtlCol="0" anchor="ctr"/>
+              <a:lstStyle/>
+              <a:p>
+                <a:pPr algn="ctr"/>
+                <a:r>
+                  <a:rPr lang="en-US" altLang="ko-KR" b="1" dirty="0">
+                    <a:solidFill>
+                      <a:schemeClr val="tx1"/>
+                    </a:solidFill>
+                  </a:rPr>
+                  <a:t>ALU</a:t>
+                </a:r>
+              </a:p>
+              <a:p>
+                <a:pPr algn="ctr"/>
+                <a:r>
+                  <a:rPr lang="en-US" altLang="ko-KR" b="1" dirty="0">
+                    <a:solidFill>
+                      <a:schemeClr val="tx1"/>
+                    </a:solidFill>
+                  </a:rPr>
+                  <a:t>Control</a:t>
+                </a:r>
+              </a:p>
+              <a:p>
+                <a:pPr algn="ctr"/>
+                <a:r>
+                  <a:rPr lang="en-US" altLang="ko-KR" b="1" dirty="0">
+                    <a:solidFill>
+                      <a:schemeClr val="tx1"/>
+                    </a:solidFill>
+                  </a:rPr>
+                  <a:t>Unit</a:t>
+                </a:r>
+                <a:endParaRPr lang="ko-KR" altLang="en-US" b="1" dirty="0">
+                  <a:solidFill>
+                    <a:schemeClr val="tx1"/>
+                  </a:solidFill>
+                </a:endParaRPr>
+              </a:p>
+            </p:txBody>
+          </p:sp>
+          <p:cxnSp>
+            <p:nvCxnSpPr>
+              <p:cNvPr id="103" name="직선 화살표 연결선 102">
+                <a:extLst>
+                  <a:ext uri="{FF2B5EF4-FFF2-40B4-BE49-F238E27FC236}">
+                    <a16:creationId xmlns:a16="http://schemas.microsoft.com/office/drawing/2014/main" id="{F151A52A-EB2D-188F-B3DE-299759D0702B}"/>
+                  </a:ext>
+                </a:extLst>
+              </p:cNvPr>
+              <p:cNvCxnSpPr>
+                <a:cxnSpLocks/>
+                <a:stCxn id="102" idx="3"/>
+              </p:cNvCxnSpPr>
+              <p:nvPr/>
+            </p:nvCxnSpPr>
+            <p:spPr>
+              <a:xfrm>
+                <a:off x="7702548" y="2483485"/>
+                <a:ext cx="773748" cy="0"/>
+              </a:xfrm>
+              <a:prstGeom prst="straightConnector1">
+                <a:avLst/>
+              </a:prstGeom>
+              <a:ln>
+                <a:tailEnd type="triangle"/>
+              </a:ln>
+            </p:spPr>
+            <p:style>
+              <a:lnRef idx="2">
+                <a:schemeClr val="dk1"/>
+              </a:lnRef>
+              <a:fillRef idx="0">
+                <a:schemeClr val="dk1"/>
+              </a:fillRef>
+              <a:effectRef idx="1">
+                <a:schemeClr val="dk1"/>
+              </a:effectRef>
+              <a:fontRef idx="minor">
+                <a:schemeClr val="tx1"/>
+              </a:fontRef>
+            </p:style>
+          </p:cxnSp>
+          <p:cxnSp>
+            <p:nvCxnSpPr>
+              <p:cNvPr id="106" name="직선 화살표 연결선 105">
+                <a:extLst>
+                  <a:ext uri="{FF2B5EF4-FFF2-40B4-BE49-F238E27FC236}">
+                    <a16:creationId xmlns:a16="http://schemas.microsoft.com/office/drawing/2014/main" id="{E5BC7B25-617F-639E-3D72-3D29A2CD623E}"/>
+                  </a:ext>
+                </a:extLst>
+              </p:cNvPr>
+              <p:cNvCxnSpPr>
+                <a:cxnSpLocks/>
+              </p:cNvCxnSpPr>
+              <p:nvPr/>
+            </p:nvCxnSpPr>
+            <p:spPr>
+              <a:xfrm>
+                <a:off x="5576252" y="2483485"/>
+                <a:ext cx="773748" cy="0"/>
+              </a:xfrm>
+              <a:prstGeom prst="straightConnector1">
+                <a:avLst/>
+              </a:prstGeom>
+              <a:ln>
+                <a:tailEnd type="triangle"/>
+              </a:ln>
+            </p:spPr>
+            <p:style>
+              <a:lnRef idx="2">
+                <a:schemeClr val="dk1"/>
+              </a:lnRef>
+              <a:fillRef idx="0">
+                <a:schemeClr val="dk1"/>
+              </a:fillRef>
+              <a:effectRef idx="1">
+                <a:schemeClr val="dk1"/>
+              </a:effectRef>
+              <a:fontRef idx="minor">
+                <a:schemeClr val="tx1"/>
+              </a:fontRef>
+            </p:style>
+          </p:cxnSp>
+        </p:grpSp>
+        <p:cxnSp>
+          <p:nvCxnSpPr>
+            <p:cNvPr id="110" name="연결선: 꺾임 109">
+              <a:extLst>
+                <a:ext uri="{FF2B5EF4-FFF2-40B4-BE49-F238E27FC236}">
+                  <a16:creationId xmlns:a16="http://schemas.microsoft.com/office/drawing/2014/main" id="{4A3E8F41-BFA3-1B1C-E5AF-21FDC3B2D898}"/>
+                </a:ext>
+              </a:extLst>
+            </p:cNvPr>
+            <p:cNvCxnSpPr>
+              <a:cxnSpLocks/>
+              <a:endCxn id="102" idx="2"/>
+            </p:cNvCxnSpPr>
+            <p:nvPr/>
+          </p:nvCxnSpPr>
+          <p:spPr>
+            <a:xfrm flipV="1">
+              <a:off x="6197600" y="2280682"/>
+              <a:ext cx="1079586" cy="221218"/>
+            </a:xfrm>
+            <a:prstGeom prst="bentConnector2">
+              <a:avLst/>
+            </a:prstGeom>
+            <a:ln>
+              <a:tailEnd type="triangle"/>
+            </a:ln>
+          </p:spPr>
+          <p:style>
+            <a:lnRef idx="2">
+              <a:schemeClr val="dk1"/>
+            </a:lnRef>
+            <a:fillRef idx="0">
+              <a:schemeClr val="dk1"/>
+            </a:fillRef>
+            <a:effectRef idx="1">
+              <a:schemeClr val="dk1"/>
+            </a:effectRef>
+            <a:fontRef idx="minor">
+              <a:schemeClr val="tx1"/>
+            </a:fontRef>
+          </p:style>
+        </p:cxnSp>
+        <p:sp>
+          <p:nvSpPr>
+            <p:cNvPr id="112" name="TextBox 111">
+              <a:extLst>
+                <a:ext uri="{FF2B5EF4-FFF2-40B4-BE49-F238E27FC236}">
+                  <a16:creationId xmlns:a16="http://schemas.microsoft.com/office/drawing/2014/main" id="{AC4F8148-C111-8A3A-8CE1-E76C5C40CF07}"/>
+                </a:ext>
+              </a:extLst>
+            </p:cNvPr>
+            <p:cNvSpPr txBox="1"/>
+            <p:nvPr/>
+          </p:nvSpPr>
+          <p:spPr>
+            <a:xfrm>
+              <a:off x="5736156" y="1101745"/>
+              <a:ext cx="694372" cy="276999"/>
+            </a:xfrm>
+            <a:prstGeom prst="rect">
+              <a:avLst/>
+            </a:prstGeom>
+            <a:noFill/>
+          </p:spPr>
+          <p:txBody>
+            <a:bodyPr wrap="square" rtlCol="0">
+              <a:spAutoFit/>
+            </a:bodyPr>
+            <a:lstStyle/>
+            <a:p>
+              <a:pPr algn="ctr"/>
+              <a:r>
+                <a:rPr lang="en-US" altLang="ko-KR" sz="1200" dirty="0" err="1"/>
+                <a:t>i_aluop</a:t>
+              </a:r>
+              <a:endParaRPr lang="ko-KR" altLang="en-US" sz="1200" dirty="0"/>
+            </a:p>
+          </p:txBody>
+        </p:sp>
+        <p:sp>
+          <p:nvSpPr>
+            <p:cNvPr id="113" name="TextBox 112">
+              <a:extLst>
+                <a:ext uri="{FF2B5EF4-FFF2-40B4-BE49-F238E27FC236}">
+                  <a16:creationId xmlns:a16="http://schemas.microsoft.com/office/drawing/2014/main" id="{4006C86D-192E-D5C8-4240-E07199CAF800}"/>
+                </a:ext>
+              </a:extLst>
+            </p:cNvPr>
+            <p:cNvSpPr txBox="1"/>
+            <p:nvPr/>
+          </p:nvSpPr>
+          <p:spPr>
+            <a:xfrm>
+              <a:off x="6396166" y="2501900"/>
+              <a:ext cx="694372" cy="276999"/>
+            </a:xfrm>
+            <a:prstGeom prst="rect">
+              <a:avLst/>
+            </a:prstGeom>
+            <a:noFill/>
+          </p:spPr>
+          <p:txBody>
+            <a:bodyPr wrap="square" rtlCol="0">
+              <a:spAutoFit/>
+            </a:bodyPr>
+            <a:lstStyle/>
+            <a:p>
+              <a:pPr algn="ctr"/>
+              <a:r>
+                <a:rPr lang="en-US" altLang="ko-KR" sz="1200" dirty="0" err="1"/>
+                <a:t>i_funct</a:t>
+              </a:r>
+              <a:endParaRPr lang="ko-KR" altLang="en-US" sz="1200" dirty="0"/>
+            </a:p>
+          </p:txBody>
+        </p:sp>
+        <p:sp>
+          <p:nvSpPr>
+            <p:cNvPr id="114" name="TextBox 113">
+              <a:extLst>
+                <a:ext uri="{FF2B5EF4-FFF2-40B4-BE49-F238E27FC236}">
+                  <a16:creationId xmlns:a16="http://schemas.microsoft.com/office/drawing/2014/main" id="{C06DD292-832E-D4D5-29BD-3F3E753DE85B}"/>
+                </a:ext>
+              </a:extLst>
+            </p:cNvPr>
+            <p:cNvSpPr txBox="1"/>
+            <p:nvPr/>
+          </p:nvSpPr>
+          <p:spPr>
+            <a:xfrm>
+              <a:off x="7993148" y="1101745"/>
+              <a:ext cx="773748" cy="276999"/>
+            </a:xfrm>
+            <a:prstGeom prst="rect">
+              <a:avLst/>
+            </a:prstGeom>
+            <a:noFill/>
+          </p:spPr>
+          <p:txBody>
+            <a:bodyPr wrap="square" rtlCol="0">
+              <a:spAutoFit/>
+            </a:bodyPr>
+            <a:lstStyle/>
+            <a:p>
+              <a:pPr algn="ctr"/>
+              <a:r>
+                <a:rPr lang="en-US" altLang="ko-KR" sz="1200" dirty="0" err="1"/>
+                <a:t>o_aluop</a:t>
+              </a:r>
+              <a:endParaRPr lang="ko-KR" altLang="en-US" sz="1200" dirty="0"/>
+            </a:p>
+          </p:txBody>
+        </p:sp>
+      </p:grpSp>
+    </p:spTree>
+    <p:extLst>
+      <p:ext uri="{BB962C8B-B14F-4D97-AF65-F5344CB8AC3E}">
+        <p14:creationId xmlns:p14="http://schemas.microsoft.com/office/powerpoint/2010/main" val="2549689887"/>
+      </p:ext>
+    </p:extLst>
+  </p:cSld>
+  <p:clrMapOvr>
+    <a:masterClrMapping/>
+  </p:clrMapOvr>
+</p:sld>
+</file>
+
+<file path=ppt/slides/slide8.xml><?xml version="1.0" encoding="utf-8"?>
+<p:sld xmlns:a="http://schemas.openxmlformats.org/drawingml/2006/main" xmlns:r="http://schemas.openxmlformats.org/officeDocument/2006/relationships" xmlns:p="http://schemas.openxmlformats.org/presentationml/2006/main">
+  <p:cSld>
+    <p:spTree>
+      <p:nvGrpSpPr>
+        <p:cNvPr id="1" name="">
+          <a:extLst>
+            <a:ext uri="{FF2B5EF4-FFF2-40B4-BE49-F238E27FC236}">
+              <a16:creationId xmlns:a16="http://schemas.microsoft.com/office/drawing/2014/main" id="{807D42A1-4D36-E258-05B5-3E4FF511B9A2}"/>
+            </a:ext>
+          </a:extLst>
+        </p:cNvPr>
+        <p:cNvGrpSpPr/>
+        <p:nvPr/>
+      </p:nvGrpSpPr>
+      <p:grpSpPr>
+        <a:xfrm>
+          <a:off x="0" y="0"/>
+          <a:ext cx="0" cy="0"/>
+          <a:chOff x="0" y="0"/>
+          <a:chExt cx="0" cy="0"/>
+        </a:xfrm>
+      </p:grpSpPr>
+    </p:spTree>
+    <p:extLst>
+      <p:ext uri="{BB962C8B-B14F-4D97-AF65-F5344CB8AC3E}">
+        <p14:creationId xmlns:p14="http://schemas.microsoft.com/office/powerpoint/2010/main" val="397773627"/>
+      </p:ext>
+    </p:extLst>
+  </p:cSld>
+  <p:clrMapOvr>
+    <a:masterClrMapping/>
+  </p:clrMapOvr>
+</p:sld>
+</file>
+
 <file path=ppt/theme/theme1.xml><?xml version="1.0" encoding="utf-8"?>
 <a:theme xmlns:a="http://schemas.openxmlformats.org/drawingml/2006/main" name="Office 테마">
   <a:themeElements>

--- a/Document/SoC_Design.pptx
+++ b/Document/SoC_Design.pptx
@@ -266,7 +266,7 @@
           <a:p>
             <a:fld id="{91FFFBF6-1629-4DED-BCA1-F2A96F07D974}" type="datetimeFigureOut">
               <a:rPr lang="ko-KR" altLang="en-US" smtClean="0"/>
-              <a:t>2026-05-17</a:t>
+              <a:t>2026-05-23</a:t>
             </a:fld>
             <a:endParaRPr lang="ko-KR" altLang="en-US"/>
           </a:p>
@@ -464,7 +464,7 @@
           <a:p>
             <a:fld id="{91FFFBF6-1629-4DED-BCA1-F2A96F07D974}" type="datetimeFigureOut">
               <a:rPr lang="ko-KR" altLang="en-US" smtClean="0"/>
-              <a:t>2026-05-17</a:t>
+              <a:t>2026-05-23</a:t>
             </a:fld>
             <a:endParaRPr lang="ko-KR" altLang="en-US"/>
           </a:p>
@@ -672,7 +672,7 @@
           <a:p>
             <a:fld id="{91FFFBF6-1629-4DED-BCA1-F2A96F07D974}" type="datetimeFigureOut">
               <a:rPr lang="ko-KR" altLang="en-US" smtClean="0"/>
-              <a:t>2026-05-17</a:t>
+              <a:t>2026-05-23</a:t>
             </a:fld>
             <a:endParaRPr lang="ko-KR" altLang="en-US"/>
           </a:p>
@@ -870,7 +870,7 @@
           <a:p>
             <a:fld id="{91FFFBF6-1629-4DED-BCA1-F2A96F07D974}" type="datetimeFigureOut">
               <a:rPr lang="ko-KR" altLang="en-US" smtClean="0"/>
-              <a:t>2026-05-17</a:t>
+              <a:t>2026-05-23</a:t>
             </a:fld>
             <a:endParaRPr lang="ko-KR" altLang="en-US"/>
           </a:p>
@@ -1145,7 +1145,7 @@
           <a:p>
             <a:fld id="{91FFFBF6-1629-4DED-BCA1-F2A96F07D974}" type="datetimeFigureOut">
               <a:rPr lang="ko-KR" altLang="en-US" smtClean="0"/>
-              <a:t>2026-05-17</a:t>
+              <a:t>2026-05-23</a:t>
             </a:fld>
             <a:endParaRPr lang="ko-KR" altLang="en-US"/>
           </a:p>
@@ -1410,7 +1410,7 @@
           <a:p>
             <a:fld id="{91FFFBF6-1629-4DED-BCA1-F2A96F07D974}" type="datetimeFigureOut">
               <a:rPr lang="ko-KR" altLang="en-US" smtClean="0"/>
-              <a:t>2026-05-17</a:t>
+              <a:t>2026-05-23</a:t>
             </a:fld>
             <a:endParaRPr lang="ko-KR" altLang="en-US"/>
           </a:p>
@@ -1822,7 +1822,7 @@
           <a:p>
             <a:fld id="{91FFFBF6-1629-4DED-BCA1-F2A96F07D974}" type="datetimeFigureOut">
               <a:rPr lang="ko-KR" altLang="en-US" smtClean="0"/>
-              <a:t>2026-05-17</a:t>
+              <a:t>2026-05-23</a:t>
             </a:fld>
             <a:endParaRPr lang="ko-KR" altLang="en-US"/>
           </a:p>
@@ -1963,7 +1963,7 @@
           <a:p>
             <a:fld id="{91FFFBF6-1629-4DED-BCA1-F2A96F07D974}" type="datetimeFigureOut">
               <a:rPr lang="ko-KR" altLang="en-US" smtClean="0"/>
-              <a:t>2026-05-17</a:t>
+              <a:t>2026-05-23</a:t>
             </a:fld>
             <a:endParaRPr lang="ko-KR" altLang="en-US"/>
           </a:p>
@@ -2076,7 +2076,7 @@
           <a:p>
             <a:fld id="{91FFFBF6-1629-4DED-BCA1-F2A96F07D974}" type="datetimeFigureOut">
               <a:rPr lang="ko-KR" altLang="en-US" smtClean="0"/>
-              <a:t>2026-05-17</a:t>
+              <a:t>2026-05-23</a:t>
             </a:fld>
             <a:endParaRPr lang="ko-KR" altLang="en-US"/>
           </a:p>
@@ -2387,7 +2387,7 @@
           <a:p>
             <a:fld id="{91FFFBF6-1629-4DED-BCA1-F2A96F07D974}" type="datetimeFigureOut">
               <a:rPr lang="ko-KR" altLang="en-US" smtClean="0"/>
-              <a:t>2026-05-17</a:t>
+              <a:t>2026-05-23</a:t>
             </a:fld>
             <a:endParaRPr lang="ko-KR" altLang="en-US"/>
           </a:p>
@@ -2675,7 +2675,7 @@
           <a:p>
             <a:fld id="{91FFFBF6-1629-4DED-BCA1-F2A96F07D974}" type="datetimeFigureOut">
               <a:rPr lang="ko-KR" altLang="en-US" smtClean="0"/>
-              <a:t>2026-05-17</a:t>
+              <a:t>2026-05-23</a:t>
             </a:fld>
             <a:endParaRPr lang="ko-KR" altLang="en-US"/>
           </a:p>
@@ -2916,7 +2916,7 @@
           <a:p>
             <a:fld id="{91FFFBF6-1629-4DED-BCA1-F2A96F07D974}" type="datetimeFigureOut">
               <a:rPr lang="ko-KR" altLang="en-US" smtClean="0"/>
-              <a:t>2026-05-17</a:t>
+              <a:t>2026-05-23</a:t>
             </a:fld>
             <a:endParaRPr lang="ko-KR" altLang="en-US"/>
           </a:p>
@@ -3355,10 +3355,10 @@
           <a:lstStyle/>
           <a:p>
             <a:r>
-              <a:rPr lang="en-US" altLang="ko-KR" dirty="0"/>
+              <a:rPr lang="en-US" altLang="ko-KR"/>
               <a:t>SoC Design</a:t>
             </a:r>
-            <a:endParaRPr lang="ko-KR" altLang="en-US" dirty="0"/>
+            <a:endParaRPr lang="ko-KR" altLang="en-US"/>
           </a:p>
         </p:txBody>
       </p:sp>
@@ -12183,14 +12183,14 @@
           <a:lstStyle/>
           <a:p>
             <a:r>
-              <a:rPr lang="en-US" altLang="ko-KR" sz="2000" dirty="0">
+              <a:rPr lang="en-US" altLang="ko-KR" sz="2000">
                 <a:latin typeface="+mj-ea"/>
                 <a:ea typeface="+mj-ea"/>
               </a:rPr>
               <a:t>0. CPU </a:t>
             </a:r>
             <a:r>
-              <a:rPr lang="ko-KR" altLang="en-US" sz="2000" dirty="0">
+              <a:rPr lang="ko-KR" altLang="en-US" sz="2000">
                 <a:latin typeface="+mj-ea"/>
                 <a:ea typeface="+mj-ea"/>
               </a:rPr>
@@ -12264,14 +12264,14 @@
           <a:lstStyle/>
           <a:p>
             <a:r>
-              <a:rPr lang="en-US" altLang="ko-KR" sz="2000" dirty="0">
+              <a:rPr lang="en-US" altLang="ko-KR" sz="2000">
                 <a:latin typeface="+mj-ea"/>
                 <a:ea typeface="+mj-ea"/>
               </a:rPr>
               <a:t>1. Pipeline </a:t>
             </a:r>
             <a:r>
-              <a:rPr lang="ko-KR" altLang="en-US" sz="2000" dirty="0">
+              <a:rPr lang="ko-KR" altLang="en-US" sz="2000">
                 <a:latin typeface="+mj-ea"/>
                 <a:ea typeface="+mj-ea"/>
               </a:rPr>
@@ -12341,12 +12341,12 @@
                     <a:p>
                       <a:pPr algn="ctr" fontAlgn="ctr"/>
                       <a:r>
-                        <a:rPr lang="en-US" sz="1100" u="none" strike="noStrike" dirty="0">
+                        <a:rPr lang="en-US" sz="1100" u="none" strike="noStrike">
                           <a:effectLst/>
                         </a:rPr>
                         <a:t>MIPS Pipeline</a:t>
                       </a:r>
-                      <a:endParaRPr lang="en-US" sz="1100" b="0" i="0" u="none" strike="noStrike" dirty="0">
+                      <a:endParaRPr lang="en-US" sz="1100" b="0" i="0" u="none" strike="noStrike">
                         <a:solidFill>
                           <a:srgbClr val="000000"/>
                         </a:solidFill>
@@ -12429,12 +12429,12 @@
                     <a:p>
                       <a:pPr algn="ctr" fontAlgn="ctr"/>
                       <a:r>
-                        <a:rPr lang="en-US" sz="1100" u="none" strike="noStrike" dirty="0">
+                        <a:rPr lang="en-US" sz="1100" u="none" strike="noStrike">
                           <a:effectLst/>
                         </a:rPr>
                         <a:t>Description</a:t>
                       </a:r>
-                      <a:endParaRPr lang="en-US" sz="1100" b="0" i="0" u="none" strike="noStrike" dirty="0">
+                      <a:endParaRPr lang="en-US" sz="1100" b="0" i="0" u="none" strike="noStrike">
                         <a:solidFill>
                           <a:srgbClr val="000000"/>
                         </a:solidFill>
@@ -12508,12 +12508,12 @@
                     <a:p>
                       <a:pPr algn="l" fontAlgn="ctr"/>
                       <a:r>
-                        <a:rPr lang="en-US" sz="1100" u="none" strike="noStrike" dirty="0">
+                        <a:rPr lang="en-US" sz="1100" u="none" strike="noStrike">
                           <a:effectLst/>
                         </a:rPr>
                         <a:t>Instruction Fetch from Memory</a:t>
                       </a:r>
-                      <a:endParaRPr lang="en-US" sz="1100" b="0" i="0" u="none" strike="noStrike" dirty="0">
+                      <a:endParaRPr lang="en-US" sz="1100" b="0" i="0" u="none" strike="noStrike">
                         <a:solidFill>
                           <a:srgbClr val="000000"/>
                         </a:solidFill>
@@ -12587,12 +12587,12 @@
                     <a:p>
                       <a:pPr algn="l" fontAlgn="ctr"/>
                       <a:r>
-                        <a:rPr lang="en-US" sz="1100" u="none" strike="noStrike" dirty="0">
+                        <a:rPr lang="en-US" sz="1100" u="none" strike="noStrike">
                           <a:effectLst/>
                         </a:rPr>
                         <a:t>Instruction Decode and Register Read</a:t>
                       </a:r>
-                      <a:endParaRPr lang="en-US" sz="1100" b="0" i="0" u="none" strike="noStrike" dirty="0">
+                      <a:endParaRPr lang="en-US" sz="1100" b="0" i="0" u="none" strike="noStrike">
                         <a:solidFill>
                           <a:srgbClr val="000000"/>
                         </a:solidFill>
@@ -12666,18 +12666,18 @@
                     <a:p>
                       <a:pPr algn="l" fontAlgn="ctr"/>
                       <a:r>
-                        <a:rPr lang="en-US" sz="1100" u="none" strike="noStrike" dirty="0">
+                        <a:rPr lang="en-US" sz="1100" u="none" strike="noStrike">
                           <a:effectLst/>
                         </a:rPr>
                         <a:t>Execute Operation or Calculate </a:t>
                       </a:r>
                       <a:r>
-                        <a:rPr lang="en-US" sz="1100" u="none" strike="noStrike" dirty="0" err="1">
+                        <a:rPr lang="en-US" sz="1100" u="none" strike="noStrike" err="1">
                           <a:effectLst/>
                         </a:rPr>
                         <a:t>ADDR</a:t>
                       </a:r>
-                      <a:endParaRPr lang="en-US" sz="1100" b="0" i="0" u="none" strike="noStrike" dirty="0">
+                      <a:endParaRPr lang="en-US" sz="1100" b="0" i="0" u="none" strike="noStrike">
                         <a:solidFill>
                           <a:srgbClr val="000000"/>
                         </a:solidFill>
@@ -12751,18 +12751,18 @@
                     <a:p>
                       <a:pPr algn="l" fontAlgn="ctr"/>
                       <a:r>
-                        <a:rPr lang="en-US" sz="1100" u="none" strike="noStrike" dirty="0">
+                        <a:rPr lang="en-US" sz="1100" u="none" strike="noStrike">
                           <a:effectLst/>
                         </a:rPr>
                         <a:t>Access Memory Operand</a:t>
                       </a:r>
                       <a:r>
-                        <a:rPr lang="ko-KR" altLang="en-US" sz="1100" u="none" strike="noStrike" dirty="0">
+                        <a:rPr lang="ko-KR" altLang="en-US" sz="1100" u="none" strike="noStrike">
                           <a:effectLst/>
                         </a:rPr>
                         <a:t>　</a:t>
                       </a:r>
-                      <a:endParaRPr lang="ko-KR" altLang="en-US" sz="1100" b="0" i="0" u="none" strike="noStrike" dirty="0">
+                      <a:endParaRPr lang="ko-KR" altLang="en-US" sz="1100" b="0" i="0" u="none" strike="noStrike">
                         <a:solidFill>
                           <a:srgbClr val="000000"/>
                         </a:solidFill>
@@ -12812,12 +12812,12 @@
                     <a:p>
                       <a:pPr algn="ctr" fontAlgn="ctr"/>
                       <a:r>
-                        <a:rPr lang="en-US" sz="1100" u="none" strike="noStrike" dirty="0">
+                        <a:rPr lang="en-US" sz="1100" u="none" strike="noStrike">
                           <a:effectLst/>
                         </a:rPr>
                         <a:t>WB</a:t>
                       </a:r>
-                      <a:endParaRPr lang="en-US" sz="1100" b="0" i="0" u="none" strike="noStrike" dirty="0">
+                      <a:endParaRPr lang="en-US" sz="1100" b="0" i="0" u="none" strike="noStrike">
                         <a:solidFill>
                           <a:srgbClr val="000000"/>
                         </a:solidFill>
@@ -12836,7 +12836,7 @@
                     <a:p>
                       <a:pPr algn="l" fontAlgn="ctr"/>
                       <a:r>
-                        <a:rPr lang="en-US" sz="1100" u="none" strike="noStrike" dirty="0">
+                        <a:rPr lang="en-US" sz="1100" u="none" strike="noStrike">
                           <a:effectLst/>
                         </a:rPr>
                         <a:t>Write Result Back to Register</a:t>
@@ -12885,21 +12885,21 @@
           <a:p>
             <a:pPr algn="ctr"/>
             <a:r>
-              <a:rPr lang="ko-KR" altLang="en-US" sz="1000" dirty="0">
+              <a:rPr lang="ko-KR" altLang="en-US" sz="1000">
                 <a:latin typeface="+mj-ea"/>
                 <a:ea typeface="+mj-ea"/>
               </a:rPr>
               <a:t>표 </a:t>
             </a:r>
             <a:r>
-              <a:rPr lang="en-US" altLang="ko-KR" sz="1000" dirty="0">
+              <a:rPr lang="en-US" altLang="ko-KR" sz="1000">
                 <a:latin typeface="+mj-ea"/>
                 <a:ea typeface="+mj-ea"/>
               </a:rPr>
               <a:t>1.1 5-Stage Pipeline </a:t>
             </a:r>
             <a:r>
-              <a:rPr lang="ko-KR" altLang="en-US" sz="1000" dirty="0">
+              <a:rPr lang="ko-KR" altLang="en-US" sz="1000">
                 <a:latin typeface="+mj-ea"/>
                 <a:ea typeface="+mj-ea"/>
               </a:rPr>
@@ -12968,35 +12968,35 @@
           <a:p>
             <a:pPr algn="ctr"/>
             <a:r>
-              <a:rPr lang="ko-KR" altLang="en-US" sz="1000" dirty="0">
+              <a:rPr lang="ko-KR" altLang="en-US" sz="1000">
                 <a:latin typeface="+mj-ea"/>
                 <a:ea typeface="+mj-ea"/>
               </a:rPr>
               <a:t>표 </a:t>
             </a:r>
             <a:r>
-              <a:rPr lang="en-US" altLang="ko-KR" sz="1000" dirty="0">
+              <a:rPr lang="en-US" altLang="ko-KR" sz="1000">
                 <a:latin typeface="+mj-ea"/>
                 <a:ea typeface="+mj-ea"/>
               </a:rPr>
               <a:t>1.2 instruction</a:t>
             </a:r>
             <a:r>
-              <a:rPr lang="ko-KR" altLang="en-US" sz="1000" dirty="0">
+              <a:rPr lang="ko-KR" altLang="en-US" sz="1000">
                 <a:latin typeface="+mj-ea"/>
                 <a:ea typeface="+mj-ea"/>
               </a:rPr>
               <a:t>별 거치는 </a:t>
             </a:r>
             <a:r>
-              <a:rPr lang="en-US" altLang="ko-KR" sz="1000" dirty="0">
+              <a:rPr lang="en-US" altLang="ko-KR" sz="1000">
                 <a:latin typeface="+mj-ea"/>
                 <a:ea typeface="+mj-ea"/>
               </a:rPr>
               <a:t>Stage </a:t>
             </a:r>
             <a:r>
-              <a:rPr lang="ko-KR" altLang="en-US" sz="1000" dirty="0">
+              <a:rPr lang="ko-KR" altLang="en-US" sz="1000">
                 <a:latin typeface="+mj-ea"/>
                 <a:ea typeface="+mj-ea"/>
               </a:rPr>
@@ -13038,7 +13038,7 @@
           <a:p>
             <a:pPr algn="ctr"/>
             <a:r>
-              <a:rPr lang="en-US" altLang="ko-KR" sz="1500" dirty="0"/>
+              <a:rPr lang="en-US" altLang="ko-KR" sz="1500"/>
               <a:t>I-CACHE</a:t>
             </a:r>
           </a:p>
@@ -13077,7 +13077,7 @@
           <a:p>
             <a:pPr algn="ctr"/>
             <a:r>
-              <a:rPr lang="en-US" altLang="ko-KR" sz="1500" dirty="0"/>
+              <a:rPr lang="en-US" altLang="ko-KR" sz="1500"/>
               <a:t>CPU</a:t>
             </a:r>
           </a:p>
@@ -13116,7 +13116,7 @@
           <a:p>
             <a:pPr algn="ctr"/>
             <a:r>
-              <a:rPr lang="en-US" altLang="ko-KR" sz="1500" dirty="0"/>
+              <a:rPr lang="en-US" altLang="ko-KR" sz="1500"/>
               <a:t>D-CACHE</a:t>
             </a:r>
           </a:p>
@@ -13155,7 +13155,7 @@
           <a:p>
             <a:pPr algn="ctr"/>
             <a:r>
-              <a:rPr lang="en-US" altLang="ko-KR" sz="1500" dirty="0"/>
+              <a:rPr lang="en-US" altLang="ko-KR" sz="1500"/>
               <a:t>STAGE</a:t>
             </a:r>
           </a:p>
@@ -14665,7 +14665,7 @@
             <a:p>
               <a:pPr algn="ctr"/>
               <a:r>
-                <a:rPr lang="en-US" altLang="ko-KR" sz="1100" dirty="0"/>
+                <a:rPr lang="en-US" altLang="ko-KR" sz="1100"/>
                 <a:t>IF</a:t>
               </a:r>
             </a:p>
@@ -14706,7 +14706,7 @@
             <a:p>
               <a:pPr algn="ctr"/>
               <a:r>
-                <a:rPr lang="en-US" altLang="ko-KR" sz="1100" dirty="0"/>
+                <a:rPr lang="en-US" altLang="ko-KR" sz="1100"/>
                 <a:t>ID</a:t>
               </a:r>
             </a:p>
@@ -14747,7 +14747,7 @@
             <a:p>
               <a:pPr algn="ctr"/>
               <a:r>
-                <a:rPr lang="en-US" altLang="ko-KR" sz="1100" dirty="0"/>
+                <a:rPr lang="en-US" altLang="ko-KR" sz="1100"/>
                 <a:t>EX</a:t>
               </a:r>
             </a:p>
@@ -14788,7 +14788,7 @@
             <a:p>
               <a:pPr algn="ctr"/>
               <a:r>
-                <a:rPr lang="en-US" altLang="ko-KR" sz="1100" dirty="0"/>
+                <a:rPr lang="en-US" altLang="ko-KR" sz="1100"/>
                 <a:t>WB</a:t>
               </a:r>
             </a:p>
@@ -14829,7 +14829,7 @@
             <a:p>
               <a:pPr algn="ctr"/>
               <a:r>
-                <a:rPr lang="en-US" altLang="ko-KR" sz="1100" dirty="0"/>
+                <a:rPr lang="en-US" altLang="ko-KR" sz="1100"/>
                 <a:t>MEM</a:t>
               </a:r>
             </a:p>
@@ -14871,10 +14871,10 @@
           <a:p>
             <a:pPr algn="ctr"/>
             <a:r>
-              <a:rPr lang="en-US" altLang="ko-KR" sz="800" dirty="0" err="1"/>
+              <a:rPr lang="en-US" altLang="ko-KR" sz="800" err="1"/>
               <a:t>o_data</a:t>
             </a:r>
-            <a:endParaRPr lang="en-US" altLang="ko-KR" sz="800" dirty="0"/>
+            <a:endParaRPr lang="en-US" altLang="ko-KR" sz="800"/>
           </a:p>
         </p:txBody>
       </p:sp>
@@ -14913,10 +14913,10 @@
           <a:p>
             <a:pPr algn="ctr"/>
             <a:r>
-              <a:rPr lang="en-US" altLang="ko-KR" sz="800" dirty="0" err="1"/>
+              <a:rPr lang="en-US" altLang="ko-KR" sz="800" err="1"/>
               <a:t>i_data</a:t>
             </a:r>
-            <a:endParaRPr lang="en-US" altLang="ko-KR" sz="800" dirty="0"/>
+            <a:endParaRPr lang="en-US" altLang="ko-KR" sz="800"/>
           </a:p>
         </p:txBody>
       </p:sp>
@@ -14955,7 +14955,7 @@
           <a:p>
             <a:pPr algn="ctr"/>
             <a:r>
-              <a:rPr lang="en-US" altLang="ko-KR" sz="800" dirty="0"/>
+              <a:rPr lang="en-US" altLang="ko-KR" sz="800"/>
               <a:t>Deco</a:t>
             </a:r>
           </a:p>
@@ -14996,7 +14996,7 @@
           <a:p>
             <a:pPr algn="ctr"/>
             <a:r>
-              <a:rPr lang="en-US" altLang="ko-KR" sz="800" dirty="0"/>
+              <a:rPr lang="en-US" altLang="ko-KR" sz="800"/>
               <a:t>Regs</a:t>
             </a:r>
           </a:p>
@@ -15037,7 +15037,7 @@
           <a:p>
             <a:pPr algn="ctr"/>
             <a:r>
-              <a:rPr lang="en-US" altLang="ko-KR" sz="800" dirty="0"/>
+              <a:rPr lang="en-US" altLang="ko-KR" sz="800"/>
               <a:t>ALU</a:t>
             </a:r>
           </a:p>
@@ -15078,10 +15078,10 @@
           <a:p>
             <a:pPr algn="ctr"/>
             <a:r>
-              <a:rPr lang="en-US" altLang="ko-KR" sz="800" dirty="0" err="1"/>
+              <a:rPr lang="en-US" altLang="ko-KR" sz="800" err="1"/>
               <a:t>o_data</a:t>
             </a:r>
-            <a:endParaRPr lang="en-US" altLang="ko-KR" sz="800" dirty="0"/>
+            <a:endParaRPr lang="en-US" altLang="ko-KR" sz="800"/>
           </a:p>
         </p:txBody>
       </p:sp>
@@ -15120,10 +15120,10 @@
           <a:p>
             <a:pPr algn="ctr"/>
             <a:r>
-              <a:rPr lang="en-US" altLang="ko-KR" sz="800" dirty="0" err="1"/>
+              <a:rPr lang="en-US" altLang="ko-KR" sz="800" err="1"/>
               <a:t>i_data</a:t>
             </a:r>
-            <a:endParaRPr lang="en-US" altLang="ko-KR" sz="800" dirty="0"/>
+            <a:endParaRPr lang="en-US" altLang="ko-KR" sz="800"/>
           </a:p>
         </p:txBody>
       </p:sp>
@@ -15162,10 +15162,10 @@
           <a:p>
             <a:pPr algn="ctr"/>
             <a:r>
-              <a:rPr lang="en-US" altLang="ko-KR" sz="800" dirty="0" err="1"/>
+              <a:rPr lang="en-US" altLang="ko-KR" sz="800" err="1"/>
               <a:t>i_data</a:t>
             </a:r>
-            <a:endParaRPr lang="en-US" altLang="ko-KR" sz="800" dirty="0"/>
+            <a:endParaRPr lang="en-US" altLang="ko-KR" sz="800"/>
           </a:p>
         </p:txBody>
       </p:sp>
@@ -15204,10 +15204,10 @@
           <a:p>
             <a:pPr algn="ctr"/>
             <a:r>
-              <a:rPr lang="en-US" altLang="ko-KR" sz="800" dirty="0" err="1"/>
+              <a:rPr lang="en-US" altLang="ko-KR" sz="800" err="1"/>
               <a:t>o_data</a:t>
             </a:r>
-            <a:endParaRPr lang="en-US" altLang="ko-KR" sz="800" dirty="0"/>
+            <a:endParaRPr lang="en-US" altLang="ko-KR" sz="800"/>
           </a:p>
         </p:txBody>
       </p:sp>
@@ -15246,7 +15246,7 @@
           <a:p>
             <a:pPr algn="ctr"/>
             <a:r>
-              <a:rPr lang="en-US" altLang="ko-KR" sz="800" dirty="0"/>
+              <a:rPr lang="en-US" altLang="ko-KR" sz="800"/>
               <a:t>Regs</a:t>
             </a:r>
           </a:p>
@@ -15317,14 +15317,14 @@
           <a:lstStyle/>
           <a:p>
             <a:r>
-              <a:rPr lang="en-US" altLang="ko-KR" sz="2000" dirty="0">
+              <a:rPr lang="en-US" altLang="ko-KR" sz="2000">
                 <a:latin typeface="+mj-ea"/>
                 <a:ea typeface="+mj-ea"/>
               </a:rPr>
               <a:t>1. Pipeline </a:t>
             </a:r>
             <a:r>
-              <a:rPr lang="ko-KR" altLang="en-US" sz="2000" dirty="0">
+              <a:rPr lang="ko-KR" altLang="en-US" sz="2000">
                 <a:latin typeface="+mj-ea"/>
                 <a:ea typeface="+mj-ea"/>
               </a:rPr>
@@ -15413,21 +15413,21 @@
             <a:p>
               <a:pPr algn="ctr"/>
               <a:r>
-                <a:rPr lang="ko-KR" altLang="en-US" sz="1000" dirty="0">
+                <a:rPr lang="ko-KR" altLang="en-US" sz="1000">
                   <a:latin typeface="+mj-ea"/>
                   <a:ea typeface="+mj-ea"/>
                 </a:rPr>
                 <a:t>그림 </a:t>
               </a:r>
               <a:r>
-                <a:rPr lang="en-US" altLang="ko-KR" sz="1000" dirty="0">
+                <a:rPr lang="en-US" altLang="ko-KR" sz="1000">
                   <a:latin typeface="+mj-ea"/>
                   <a:ea typeface="+mj-ea"/>
                 </a:rPr>
                 <a:t>1.1 Hazard </a:t>
               </a:r>
               <a:r>
-                <a:rPr lang="ko-KR" altLang="en-US" sz="1000" dirty="0">
+                <a:rPr lang="ko-KR" altLang="en-US" sz="1000">
                   <a:latin typeface="+mj-ea"/>
                   <a:ea typeface="+mj-ea"/>
                 </a:rPr>
@@ -15502,14 +15502,14 @@
           <a:lstStyle/>
           <a:p>
             <a:r>
-              <a:rPr lang="en-US" altLang="ko-KR" sz="2000" dirty="0">
+              <a:rPr lang="en-US" altLang="ko-KR" sz="2000">
                 <a:latin typeface="+mj-ea"/>
                 <a:ea typeface="+mj-ea"/>
               </a:rPr>
               <a:t>1. Pipeline </a:t>
             </a:r>
             <a:r>
-              <a:rPr lang="ko-KR" altLang="en-US" sz="2000" dirty="0">
+              <a:rPr lang="ko-KR" altLang="en-US" sz="2000">
                 <a:latin typeface="+mj-ea"/>
                 <a:ea typeface="+mj-ea"/>
               </a:rPr>
@@ -15613,14 +15613,14 @@
           <a:lstStyle/>
           <a:p>
             <a:r>
-              <a:rPr lang="en-US" altLang="ko-KR" sz="2000" dirty="0">
+              <a:rPr lang="en-US" altLang="ko-KR" sz="2000">
                 <a:latin typeface="+mj-ea"/>
                 <a:ea typeface="+mj-ea"/>
               </a:rPr>
               <a:t>1. Pipeline </a:t>
             </a:r>
             <a:r>
-              <a:rPr lang="ko-KR" altLang="en-US" sz="2000" dirty="0">
+              <a:rPr lang="ko-KR" altLang="en-US" sz="2000">
                 <a:latin typeface="+mj-ea"/>
                 <a:ea typeface="+mj-ea"/>
               </a:rPr>
@@ -16026,10 +16026,10 @@
             <a:p>
               <a:pPr algn="ctr"/>
               <a:r>
-                <a:rPr lang="en-US" altLang="ko-KR" b="1" dirty="0"/>
+                <a:rPr lang="en-US" altLang="ko-KR" b="1"/>
                 <a:t>Adder</a:t>
               </a:r>
-              <a:endParaRPr lang="ko-KR" altLang="en-US" b="1" dirty="0"/>
+              <a:endParaRPr lang="ko-KR" altLang="en-US" b="1"/>
             </a:p>
           </p:txBody>
         </p:sp>
@@ -16186,10 +16186,10 @@
             <a:p>
               <a:pPr algn="ctr"/>
               <a:r>
-                <a:rPr lang="en-US" altLang="ko-KR" sz="1200" dirty="0" err="1"/>
+                <a:rPr lang="en-US" altLang="ko-KR" sz="1200" err="1"/>
                 <a:t>i_i0</a:t>
               </a:r>
-              <a:endParaRPr lang="ko-KR" altLang="en-US" sz="1200" dirty="0"/>
+              <a:endParaRPr lang="ko-KR" altLang="en-US" sz="1200"/>
             </a:p>
           </p:txBody>
         </p:sp>
@@ -16223,10 +16223,10 @@
             <a:p>
               <a:pPr algn="ctr"/>
               <a:r>
-                <a:rPr lang="en-US" altLang="ko-KR" sz="1200" dirty="0" err="1"/>
+                <a:rPr lang="en-US" altLang="ko-KR" sz="1200" err="1"/>
                 <a:t>i_i1</a:t>
               </a:r>
-              <a:endParaRPr lang="ko-KR" altLang="en-US" sz="1200" dirty="0"/>
+              <a:endParaRPr lang="ko-KR" altLang="en-US" sz="1200"/>
             </a:p>
           </p:txBody>
         </p:sp>
@@ -16260,10 +16260,10 @@
             <a:p>
               <a:pPr algn="ctr"/>
               <a:r>
-                <a:rPr lang="en-US" altLang="ko-KR" sz="1200" dirty="0" err="1"/>
+                <a:rPr lang="en-US" altLang="ko-KR" sz="1200" err="1"/>
                 <a:t>o_o</a:t>
               </a:r>
-              <a:endParaRPr lang="ko-KR" altLang="en-US" sz="1200" dirty="0"/>
+              <a:endParaRPr lang="ko-KR" altLang="en-US" sz="1200"/>
             </a:p>
           </p:txBody>
         </p:sp>
@@ -16625,10 +16625,10 @@
               <a:p>
                 <a:pPr algn="ctr"/>
                 <a:r>
-                  <a:rPr lang="en-US" altLang="ko-KR" b="1" dirty="0"/>
+                  <a:rPr lang="en-US" altLang="ko-KR" b="1"/>
                   <a:t>ALU</a:t>
                 </a:r>
-                <a:endParaRPr lang="ko-KR" altLang="en-US" b="1" dirty="0"/>
+                <a:endParaRPr lang="ko-KR" altLang="en-US" b="1"/>
               </a:p>
             </p:txBody>
           </p:sp>
@@ -16785,10 +16785,10 @@
               <a:p>
                 <a:pPr algn="ctr"/>
                 <a:r>
-                  <a:rPr lang="en-US" altLang="ko-KR" sz="1200" dirty="0" err="1"/>
+                  <a:rPr lang="en-US" altLang="ko-KR" sz="1200" err="1"/>
                   <a:t>i_in0</a:t>
                 </a:r>
-                <a:endParaRPr lang="ko-KR" altLang="en-US" sz="1200" dirty="0"/>
+                <a:endParaRPr lang="ko-KR" altLang="en-US" sz="1200"/>
               </a:p>
             </p:txBody>
           </p:sp>
@@ -16822,10 +16822,10 @@
               <a:p>
                 <a:pPr algn="ctr"/>
                 <a:r>
-                  <a:rPr lang="en-US" altLang="ko-KR" sz="1200" dirty="0" err="1"/>
+                  <a:rPr lang="en-US" altLang="ko-KR" sz="1200" err="1"/>
                   <a:t>i_in1</a:t>
                 </a:r>
-                <a:endParaRPr lang="ko-KR" altLang="en-US" sz="1200" dirty="0"/>
+                <a:endParaRPr lang="ko-KR" altLang="en-US" sz="1200"/>
               </a:p>
             </p:txBody>
           </p:sp>
@@ -16859,10 +16859,10 @@
               <a:p>
                 <a:pPr algn="ctr"/>
                 <a:r>
-                  <a:rPr lang="en-US" altLang="ko-KR" sz="1200" dirty="0" err="1"/>
+                  <a:rPr lang="en-US" altLang="ko-KR" sz="1200" err="1"/>
                   <a:t>o_out</a:t>
                 </a:r>
-                <a:endParaRPr lang="ko-KR" altLang="en-US" sz="1200" dirty="0"/>
+                <a:endParaRPr lang="ko-KR" altLang="en-US" sz="1200"/>
               </a:p>
             </p:txBody>
           </p:sp>
@@ -16896,10 +16896,10 @@
               <a:p>
                 <a:pPr algn="ctr"/>
                 <a:r>
-                  <a:rPr lang="en-US" altLang="ko-KR" sz="1200" dirty="0" err="1"/>
+                  <a:rPr lang="en-US" altLang="ko-KR" sz="1200" err="1"/>
                   <a:t>i_aluop</a:t>
                 </a:r>
-                <a:endParaRPr lang="ko-KR" altLang="en-US" sz="1200" dirty="0"/>
+                <a:endParaRPr lang="ko-KR" altLang="en-US" sz="1200"/>
               </a:p>
             </p:txBody>
           </p:sp>
@@ -16974,10 +16974,10 @@
               <a:p>
                 <a:pPr algn="ctr"/>
                 <a:r>
-                  <a:rPr lang="en-US" altLang="ko-KR" sz="1200" dirty="0" err="1"/>
+                  <a:rPr lang="en-US" altLang="ko-KR" sz="1200" err="1"/>
                   <a:t>o_zero</a:t>
                 </a:r>
-                <a:endParaRPr lang="ko-KR" altLang="en-US" sz="1200" dirty="0"/>
+                <a:endParaRPr lang="ko-KR" altLang="en-US" sz="1200"/>
               </a:p>
             </p:txBody>
           </p:sp>
@@ -17113,7 +17113,7 @@
               <a:p>
                 <a:pPr algn="ctr"/>
                 <a:r>
-                  <a:rPr lang="en-US" altLang="ko-KR" b="1" dirty="0">
+                  <a:rPr lang="en-US" altLang="ko-KR" b="1">
                     <a:solidFill>
                       <a:schemeClr val="tx1"/>
                     </a:solidFill>
@@ -17124,7 +17124,7 @@
               <a:p>
                 <a:pPr algn="ctr"/>
                 <a:r>
-                  <a:rPr lang="en-US" altLang="ko-KR" b="1" dirty="0">
+                  <a:rPr lang="en-US" altLang="ko-KR" b="1">
                     <a:solidFill>
                       <a:schemeClr val="tx1"/>
                     </a:solidFill>
@@ -17135,14 +17135,14 @@
               <a:p>
                 <a:pPr algn="ctr"/>
                 <a:r>
-                  <a:rPr lang="en-US" altLang="ko-KR" b="1" dirty="0">
+                  <a:rPr lang="en-US" altLang="ko-KR" b="1">
                     <a:solidFill>
                       <a:schemeClr val="tx1"/>
                     </a:solidFill>
                   </a:rPr>
                   <a:t>Unit</a:t>
                 </a:r>
-                <a:endParaRPr lang="ko-KR" altLang="en-US" b="1" dirty="0">
+                <a:endParaRPr lang="ko-KR" altLang="en-US" b="1">
                   <a:solidFill>
                     <a:schemeClr val="tx1"/>
                   </a:solidFill>
@@ -17306,10 +17306,10 @@
             <a:p>
               <a:pPr algn="ctr"/>
               <a:r>
-                <a:rPr lang="en-US" altLang="ko-KR" sz="1200" dirty="0" err="1"/>
+                <a:rPr lang="en-US" altLang="ko-KR" sz="1200" err="1"/>
                 <a:t>i_aluop</a:t>
               </a:r>
-              <a:endParaRPr lang="ko-KR" altLang="en-US" sz="1200" dirty="0"/>
+              <a:endParaRPr lang="ko-KR" altLang="en-US" sz="1200"/>
             </a:p>
           </p:txBody>
         </p:sp>
@@ -17343,10 +17343,10 @@
             <a:p>
               <a:pPr algn="ctr"/>
               <a:r>
-                <a:rPr lang="en-US" altLang="ko-KR" sz="1200" dirty="0" err="1"/>
+                <a:rPr lang="en-US" altLang="ko-KR" sz="1200" err="1"/>
                 <a:t>i_funct</a:t>
               </a:r>
-              <a:endParaRPr lang="ko-KR" altLang="en-US" sz="1200" dirty="0"/>
+              <a:endParaRPr lang="ko-KR" altLang="en-US" sz="1200"/>
             </a:p>
           </p:txBody>
         </p:sp>
@@ -17380,10 +17380,10 @@
             <a:p>
               <a:pPr algn="ctr"/>
               <a:r>
-                <a:rPr lang="en-US" altLang="ko-KR" sz="1200" dirty="0" err="1"/>
+                <a:rPr lang="en-US" altLang="ko-KR" sz="1200" err="1"/>
                 <a:t>o_aluop</a:t>
               </a:r>
-              <a:endParaRPr lang="ko-KR" altLang="en-US" sz="1200" dirty="0"/>
+              <a:endParaRPr lang="ko-KR" altLang="en-US" sz="1200"/>
             </a:p>
           </p:txBody>
         </p:sp>
@@ -17424,6 +17424,772 @@
           <a:chExt cx="0" cy="0"/>
         </a:xfrm>
       </p:grpSpPr>
+      <p:grpSp>
+        <p:nvGrpSpPr>
+          <p:cNvPr id="52" name="그룹 51">
+            <a:extLst>
+              <a:ext uri="{FF2B5EF4-FFF2-40B4-BE49-F238E27FC236}">
+                <a16:creationId xmlns:a16="http://schemas.microsoft.com/office/drawing/2014/main" id="{752DF963-8452-36CC-D96A-BA1CB9BC98A7}"/>
+              </a:ext>
+            </a:extLst>
+          </p:cNvPr>
+          <p:cNvGrpSpPr/>
+          <p:nvPr/>
+        </p:nvGrpSpPr>
+        <p:grpSpPr>
+          <a:xfrm>
+            <a:off x="384890" y="508884"/>
+            <a:ext cx="3841756" cy="2134728"/>
+            <a:chOff x="384890" y="508884"/>
+            <a:chExt cx="3841756" cy="2134728"/>
+          </a:xfrm>
+        </p:grpSpPr>
+        <p:grpSp>
+          <p:nvGrpSpPr>
+            <p:cNvPr id="2" name="그룹 1">
+              <a:extLst>
+                <a:ext uri="{FF2B5EF4-FFF2-40B4-BE49-F238E27FC236}">
+                  <a16:creationId xmlns:a16="http://schemas.microsoft.com/office/drawing/2014/main" id="{985E1E96-BC76-64F2-4E60-7C0E5B72BA67}"/>
+                </a:ext>
+              </a:extLst>
+            </p:cNvPr>
+            <p:cNvGrpSpPr/>
+            <p:nvPr/>
+          </p:nvGrpSpPr>
+          <p:grpSpPr>
+            <a:xfrm>
+              <a:off x="384890" y="508884"/>
+              <a:ext cx="3841756" cy="2074051"/>
+              <a:chOff x="5503940" y="526811"/>
+              <a:chExt cx="3841756" cy="2074051"/>
+            </a:xfrm>
+          </p:grpSpPr>
+          <p:grpSp>
+            <p:nvGrpSpPr>
+              <p:cNvPr id="3" name="그룹 2">
+                <a:extLst>
+                  <a:ext uri="{FF2B5EF4-FFF2-40B4-BE49-F238E27FC236}">
+                    <a16:creationId xmlns:a16="http://schemas.microsoft.com/office/drawing/2014/main" id="{1E1B3601-3537-FE98-EE41-A65FE2546EF3}"/>
+                  </a:ext>
+                </a:extLst>
+              </p:cNvPr>
+              <p:cNvGrpSpPr/>
+              <p:nvPr/>
+            </p:nvGrpSpPr>
+            <p:grpSpPr>
+              <a:xfrm>
+                <a:off x="5827164" y="526812"/>
+                <a:ext cx="3067181" cy="1473824"/>
+                <a:chOff x="5576252" y="1606550"/>
+                <a:chExt cx="3067181" cy="1473824"/>
+              </a:xfrm>
+            </p:grpSpPr>
+            <p:sp>
+              <p:nvSpPr>
+                <p:cNvPr id="8" name="직사각형 7">
+                  <a:extLst>
+                    <a:ext uri="{FF2B5EF4-FFF2-40B4-BE49-F238E27FC236}">
+                      <a16:creationId xmlns:a16="http://schemas.microsoft.com/office/drawing/2014/main" id="{FBA88BF7-DA6D-2331-3DEE-1FEA5A3D4BCF}"/>
+                    </a:ext>
+                  </a:extLst>
+                </p:cNvPr>
+                <p:cNvSpPr/>
+                <p:nvPr/>
+              </p:nvSpPr>
+              <p:spPr>
+                <a:xfrm>
+                  <a:off x="6350000" y="1606550"/>
+                  <a:ext cx="1352548" cy="1473824"/>
+                </a:xfrm>
+                <a:prstGeom prst="rect">
+                  <a:avLst/>
+                </a:prstGeom>
+                <a:noFill/>
+                <a:ln>
+                  <a:solidFill>
+                    <a:schemeClr val="tx1"/>
+                  </a:solidFill>
+                </a:ln>
+              </p:spPr>
+              <p:style>
+                <a:lnRef idx="2">
+                  <a:schemeClr val="accent1">
+                    <a:shade val="15000"/>
+                  </a:schemeClr>
+                </a:lnRef>
+                <a:fillRef idx="1">
+                  <a:schemeClr val="accent1"/>
+                </a:fillRef>
+                <a:effectRef idx="0">
+                  <a:schemeClr val="accent1"/>
+                </a:effectRef>
+                <a:fontRef idx="minor">
+                  <a:schemeClr val="lt1"/>
+                </a:fontRef>
+              </p:style>
+              <p:txBody>
+                <a:bodyPr rtlCol="0" anchor="ctr"/>
+                <a:lstStyle/>
+                <a:p>
+                  <a:pPr algn="ctr"/>
+                  <a:r>
+                    <a:rPr lang="en-US" altLang="ko-KR" b="1">
+                      <a:solidFill>
+                        <a:schemeClr val="tx1"/>
+                      </a:solidFill>
+                    </a:rPr>
+                    <a:t>IF-ID</a:t>
+                  </a:r>
+                </a:p>
+                <a:p>
+                  <a:pPr algn="ctr"/>
+                  <a:r>
+                    <a:rPr lang="en-US" altLang="ko-KR" b="1">
+                      <a:solidFill>
+                        <a:schemeClr val="tx1"/>
+                      </a:solidFill>
+                    </a:rPr>
+                    <a:t>Bridge</a:t>
+                  </a:r>
+                  <a:endParaRPr lang="ko-KR" altLang="en-US" b="1">
+                    <a:solidFill>
+                      <a:schemeClr val="tx1"/>
+                    </a:solidFill>
+                  </a:endParaRPr>
+                </a:p>
+              </p:txBody>
+            </p:sp>
+            <p:cxnSp>
+              <p:nvCxnSpPr>
+                <p:cNvPr id="9" name="직선 화살표 연결선 8">
+                  <a:extLst>
+                    <a:ext uri="{FF2B5EF4-FFF2-40B4-BE49-F238E27FC236}">
+                      <a16:creationId xmlns:a16="http://schemas.microsoft.com/office/drawing/2014/main" id="{BD80A892-4CD2-D061-7E57-3864A40A70BE}"/>
+                    </a:ext>
+                  </a:extLst>
+                </p:cNvPr>
+                <p:cNvCxnSpPr>
+                  <a:cxnSpLocks/>
+                </p:cNvCxnSpPr>
+                <p:nvPr/>
+              </p:nvCxnSpPr>
+              <p:spPr>
+                <a:xfrm flipV="1">
+                  <a:off x="7702548" y="2560400"/>
+                  <a:ext cx="940885" cy="1"/>
+                </a:xfrm>
+                <a:prstGeom prst="straightConnector1">
+                  <a:avLst/>
+                </a:prstGeom>
+                <a:ln>
+                  <a:tailEnd type="triangle"/>
+                </a:ln>
+              </p:spPr>
+              <p:style>
+                <a:lnRef idx="2">
+                  <a:schemeClr val="dk1"/>
+                </a:lnRef>
+                <a:fillRef idx="0">
+                  <a:schemeClr val="dk1"/>
+                </a:fillRef>
+                <a:effectRef idx="1">
+                  <a:schemeClr val="dk1"/>
+                </a:effectRef>
+                <a:fontRef idx="minor">
+                  <a:schemeClr val="tx1"/>
+                </a:fontRef>
+              </p:style>
+            </p:cxnSp>
+            <p:cxnSp>
+              <p:nvCxnSpPr>
+                <p:cNvPr id="10" name="직선 화살표 연결선 9">
+                  <a:extLst>
+                    <a:ext uri="{FF2B5EF4-FFF2-40B4-BE49-F238E27FC236}">
+                      <a16:creationId xmlns:a16="http://schemas.microsoft.com/office/drawing/2014/main" id="{2D81DCFB-53F8-88FF-474E-A7F2138D585B}"/>
+                    </a:ext>
+                  </a:extLst>
+                </p:cNvPr>
+                <p:cNvCxnSpPr>
+                  <a:cxnSpLocks/>
+                </p:cNvCxnSpPr>
+                <p:nvPr/>
+              </p:nvCxnSpPr>
+              <p:spPr>
+                <a:xfrm>
+                  <a:off x="5576252" y="1908551"/>
+                  <a:ext cx="773748" cy="0"/>
+                </a:xfrm>
+                <a:prstGeom prst="straightConnector1">
+                  <a:avLst/>
+                </a:prstGeom>
+                <a:ln>
+                  <a:tailEnd type="triangle"/>
+                </a:ln>
+              </p:spPr>
+              <p:style>
+                <a:lnRef idx="2">
+                  <a:schemeClr val="dk1"/>
+                </a:lnRef>
+                <a:fillRef idx="0">
+                  <a:schemeClr val="dk1"/>
+                </a:fillRef>
+                <a:effectRef idx="1">
+                  <a:schemeClr val="dk1"/>
+                </a:effectRef>
+                <a:fontRef idx="minor">
+                  <a:schemeClr val="tx1"/>
+                </a:fontRef>
+              </p:style>
+            </p:cxnSp>
+            <p:cxnSp>
+              <p:nvCxnSpPr>
+                <p:cNvPr id="13" name="직선 화살표 연결선 12">
+                  <a:extLst>
+                    <a:ext uri="{FF2B5EF4-FFF2-40B4-BE49-F238E27FC236}">
+                      <a16:creationId xmlns:a16="http://schemas.microsoft.com/office/drawing/2014/main" id="{AA1E185E-48C2-91DE-91A0-1E4A06C241FE}"/>
+                    </a:ext>
+                  </a:extLst>
+                </p:cNvPr>
+                <p:cNvCxnSpPr>
+                  <a:cxnSpLocks/>
+                </p:cNvCxnSpPr>
+                <p:nvPr/>
+              </p:nvCxnSpPr>
+              <p:spPr>
+                <a:xfrm>
+                  <a:off x="5576252" y="2234475"/>
+                  <a:ext cx="773748" cy="0"/>
+                </a:xfrm>
+                <a:prstGeom prst="straightConnector1">
+                  <a:avLst/>
+                </a:prstGeom>
+                <a:ln>
+                  <a:tailEnd type="triangle"/>
+                </a:ln>
+              </p:spPr>
+              <p:style>
+                <a:lnRef idx="2">
+                  <a:schemeClr val="dk1"/>
+                </a:lnRef>
+                <a:fillRef idx="0">
+                  <a:schemeClr val="dk1"/>
+                </a:fillRef>
+                <a:effectRef idx="1">
+                  <a:schemeClr val="dk1"/>
+                </a:effectRef>
+                <a:fontRef idx="minor">
+                  <a:schemeClr val="tx1"/>
+                </a:fontRef>
+              </p:style>
+            </p:cxnSp>
+            <p:cxnSp>
+              <p:nvCxnSpPr>
+                <p:cNvPr id="19" name="직선 화살표 연결선 18">
+                  <a:extLst>
+                    <a:ext uri="{FF2B5EF4-FFF2-40B4-BE49-F238E27FC236}">
+                      <a16:creationId xmlns:a16="http://schemas.microsoft.com/office/drawing/2014/main" id="{AD064228-24B5-F043-C56A-761E5946115E}"/>
+                    </a:ext>
+                  </a:extLst>
+                </p:cNvPr>
+                <p:cNvCxnSpPr>
+                  <a:cxnSpLocks/>
+                </p:cNvCxnSpPr>
+                <p:nvPr/>
+              </p:nvCxnSpPr>
+              <p:spPr>
+                <a:xfrm>
+                  <a:off x="5576252" y="2560400"/>
+                  <a:ext cx="773748" cy="0"/>
+                </a:xfrm>
+                <a:prstGeom prst="straightConnector1">
+                  <a:avLst/>
+                </a:prstGeom>
+                <a:ln>
+                  <a:tailEnd type="triangle"/>
+                </a:ln>
+              </p:spPr>
+              <p:style>
+                <a:lnRef idx="2">
+                  <a:schemeClr val="dk1"/>
+                </a:lnRef>
+                <a:fillRef idx="0">
+                  <a:schemeClr val="dk1"/>
+                </a:fillRef>
+                <a:effectRef idx="1">
+                  <a:schemeClr val="dk1"/>
+                </a:effectRef>
+                <a:fontRef idx="minor">
+                  <a:schemeClr val="tx1"/>
+                </a:fontRef>
+              </p:style>
+            </p:cxnSp>
+            <p:cxnSp>
+              <p:nvCxnSpPr>
+                <p:cNvPr id="20" name="직선 화살표 연결선 19">
+                  <a:extLst>
+                    <a:ext uri="{FF2B5EF4-FFF2-40B4-BE49-F238E27FC236}">
+                      <a16:creationId xmlns:a16="http://schemas.microsoft.com/office/drawing/2014/main" id="{341769B2-3F50-FB3B-7D98-BAC862D90381}"/>
+                    </a:ext>
+                  </a:extLst>
+                </p:cNvPr>
+                <p:cNvCxnSpPr>
+                  <a:cxnSpLocks/>
+                </p:cNvCxnSpPr>
+                <p:nvPr/>
+              </p:nvCxnSpPr>
+              <p:spPr>
+                <a:xfrm>
+                  <a:off x="5576252" y="2886324"/>
+                  <a:ext cx="773748" cy="0"/>
+                </a:xfrm>
+                <a:prstGeom prst="straightConnector1">
+                  <a:avLst/>
+                </a:prstGeom>
+                <a:ln>
+                  <a:tailEnd type="triangle"/>
+                </a:ln>
+              </p:spPr>
+              <p:style>
+                <a:lnRef idx="2">
+                  <a:schemeClr val="dk1"/>
+                </a:lnRef>
+                <a:fillRef idx="0">
+                  <a:schemeClr val="dk1"/>
+                </a:fillRef>
+                <a:effectRef idx="1">
+                  <a:schemeClr val="dk1"/>
+                </a:effectRef>
+                <a:fontRef idx="minor">
+                  <a:schemeClr val="tx1"/>
+                </a:fontRef>
+              </p:style>
+            </p:cxnSp>
+            <p:cxnSp>
+              <p:nvCxnSpPr>
+                <p:cNvPr id="27" name="직선 화살표 연결선 26">
+                  <a:extLst>
+                    <a:ext uri="{FF2B5EF4-FFF2-40B4-BE49-F238E27FC236}">
+                      <a16:creationId xmlns:a16="http://schemas.microsoft.com/office/drawing/2014/main" id="{FB65A209-9413-9C84-7276-5F1BA65C75A3}"/>
+                    </a:ext>
+                  </a:extLst>
+                </p:cNvPr>
+                <p:cNvCxnSpPr>
+                  <a:cxnSpLocks/>
+                </p:cNvCxnSpPr>
+                <p:nvPr/>
+              </p:nvCxnSpPr>
+              <p:spPr>
+                <a:xfrm flipV="1">
+                  <a:off x="7702548" y="2872186"/>
+                  <a:ext cx="940885" cy="1"/>
+                </a:xfrm>
+                <a:prstGeom prst="straightConnector1">
+                  <a:avLst/>
+                </a:prstGeom>
+                <a:ln>
+                  <a:tailEnd type="triangle"/>
+                </a:ln>
+              </p:spPr>
+              <p:style>
+                <a:lnRef idx="2">
+                  <a:schemeClr val="dk1"/>
+                </a:lnRef>
+                <a:fillRef idx="0">
+                  <a:schemeClr val="dk1"/>
+                </a:fillRef>
+                <a:effectRef idx="1">
+                  <a:schemeClr val="dk1"/>
+                </a:effectRef>
+                <a:fontRef idx="minor">
+                  <a:schemeClr val="tx1"/>
+                </a:fontRef>
+              </p:style>
+            </p:cxnSp>
+          </p:grpSp>
+          <p:sp>
+            <p:nvSpPr>
+              <p:cNvPr id="5" name="TextBox 4">
+                <a:extLst>
+                  <a:ext uri="{FF2B5EF4-FFF2-40B4-BE49-F238E27FC236}">
+                    <a16:creationId xmlns:a16="http://schemas.microsoft.com/office/drawing/2014/main" id="{72CFD1A8-E3B9-E45C-22FA-304D2C0E0537}"/>
+                  </a:ext>
+                </a:extLst>
+              </p:cNvPr>
+              <p:cNvSpPr txBox="1"/>
+              <p:nvPr/>
+            </p:nvSpPr>
+            <p:spPr>
+              <a:xfrm>
+                <a:off x="5519666" y="526811"/>
+                <a:ext cx="694372" cy="276999"/>
+              </a:xfrm>
+              <a:prstGeom prst="rect">
+                <a:avLst/>
+              </a:prstGeom>
+              <a:noFill/>
+            </p:spPr>
+            <p:txBody>
+              <a:bodyPr wrap="square" rtlCol="0">
+                <a:spAutoFit/>
+              </a:bodyPr>
+              <a:lstStyle/>
+              <a:p>
+                <a:r>
+                  <a:rPr lang="en-US" altLang="ko-KR" sz="1200" err="1"/>
+                  <a:t>clk</a:t>
+                </a:r>
+                <a:endParaRPr lang="ko-KR" altLang="en-US" sz="1200"/>
+              </a:p>
+            </p:txBody>
+          </p:sp>
+          <p:sp>
+            <p:nvSpPr>
+              <p:cNvPr id="7" name="TextBox 6">
+                <a:extLst>
+                  <a:ext uri="{FF2B5EF4-FFF2-40B4-BE49-F238E27FC236}">
+                    <a16:creationId xmlns:a16="http://schemas.microsoft.com/office/drawing/2014/main" id="{A17075DD-27A4-3933-8778-B3BE8651B394}"/>
+                  </a:ext>
+                </a:extLst>
+              </p:cNvPr>
+              <p:cNvSpPr txBox="1"/>
+              <p:nvPr/>
+            </p:nvSpPr>
+            <p:spPr>
+              <a:xfrm>
+                <a:off x="7993148" y="1178659"/>
+                <a:ext cx="1352548" cy="276999"/>
+              </a:xfrm>
+              <a:prstGeom prst="rect">
+                <a:avLst/>
+              </a:prstGeom>
+              <a:noFill/>
+            </p:spPr>
+            <p:txBody>
+              <a:bodyPr wrap="square" rtlCol="0">
+                <a:spAutoFit/>
+              </a:bodyPr>
+              <a:lstStyle/>
+              <a:p>
+                <a:r>
+                  <a:rPr lang="en-US" altLang="ko-KR" sz="1200"/>
+                  <a:t>o_i_mem_data</a:t>
+                </a:r>
+                <a:endParaRPr lang="ko-KR" altLang="en-US" sz="1200"/>
+              </a:p>
+            </p:txBody>
+          </p:sp>
+          <p:sp>
+            <p:nvSpPr>
+              <p:cNvPr id="14" name="TextBox 13">
+                <a:extLst>
+                  <a:ext uri="{FF2B5EF4-FFF2-40B4-BE49-F238E27FC236}">
+                    <a16:creationId xmlns:a16="http://schemas.microsoft.com/office/drawing/2014/main" id="{86298B28-9F02-8963-0A00-14E836B17D00}"/>
+                  </a:ext>
+                </a:extLst>
+              </p:cNvPr>
+              <p:cNvSpPr txBox="1"/>
+              <p:nvPr/>
+            </p:nvSpPr>
+            <p:spPr>
+              <a:xfrm>
+                <a:off x="5519666" y="852735"/>
+                <a:ext cx="694372" cy="276999"/>
+              </a:xfrm>
+              <a:prstGeom prst="rect">
+                <a:avLst/>
+              </a:prstGeom>
+              <a:noFill/>
+            </p:spPr>
+            <p:txBody>
+              <a:bodyPr wrap="square" rtlCol="0">
+                <a:spAutoFit/>
+              </a:bodyPr>
+              <a:lstStyle/>
+              <a:p>
+                <a:r>
+                  <a:rPr lang="en-US" altLang="ko-KR" sz="1200" err="1"/>
+                  <a:t>rst_n</a:t>
+                </a:r>
+                <a:endParaRPr lang="ko-KR" altLang="en-US" sz="1200"/>
+              </a:p>
+            </p:txBody>
+          </p:sp>
+          <p:sp>
+            <p:nvSpPr>
+              <p:cNvPr id="21" name="TextBox 20">
+                <a:extLst>
+                  <a:ext uri="{FF2B5EF4-FFF2-40B4-BE49-F238E27FC236}">
+                    <a16:creationId xmlns:a16="http://schemas.microsoft.com/office/drawing/2014/main" id="{F70C7061-7601-1F02-204E-83108D5686EA}"/>
+                  </a:ext>
+                </a:extLst>
+              </p:cNvPr>
+              <p:cNvSpPr txBox="1"/>
+              <p:nvPr/>
+            </p:nvSpPr>
+            <p:spPr>
+              <a:xfrm>
+                <a:off x="5503940" y="1178660"/>
+                <a:ext cx="1182164" cy="276999"/>
+              </a:xfrm>
+              <a:prstGeom prst="rect">
+                <a:avLst/>
+              </a:prstGeom>
+              <a:noFill/>
+            </p:spPr>
+            <p:txBody>
+              <a:bodyPr wrap="square" rtlCol="0">
+                <a:spAutoFit/>
+              </a:bodyPr>
+              <a:lstStyle/>
+              <a:p>
+                <a:r>
+                  <a:rPr lang="en-US" altLang="ko-KR" sz="1200" err="1"/>
+                  <a:t>i_i_mem_data</a:t>
+                </a:r>
+                <a:endParaRPr lang="ko-KR" altLang="en-US" sz="1200"/>
+              </a:p>
+            </p:txBody>
+          </p:sp>
+          <p:sp>
+            <p:nvSpPr>
+              <p:cNvPr id="22" name="TextBox 21">
+                <a:extLst>
+                  <a:ext uri="{FF2B5EF4-FFF2-40B4-BE49-F238E27FC236}">
+                    <a16:creationId xmlns:a16="http://schemas.microsoft.com/office/drawing/2014/main" id="{914AAF98-33DB-CA82-4008-8CAAFFC20617}"/>
+                  </a:ext>
+                </a:extLst>
+              </p:cNvPr>
+              <p:cNvSpPr txBox="1"/>
+              <p:nvPr/>
+            </p:nvSpPr>
+            <p:spPr>
+              <a:xfrm>
+                <a:off x="5503940" y="1504584"/>
+                <a:ext cx="931232" cy="276999"/>
+              </a:xfrm>
+              <a:prstGeom prst="rect">
+                <a:avLst/>
+              </a:prstGeom>
+              <a:noFill/>
+            </p:spPr>
+            <p:txBody>
+              <a:bodyPr wrap="square" rtlCol="0">
+                <a:spAutoFit/>
+              </a:bodyPr>
+              <a:lstStyle/>
+              <a:p>
+                <a:r>
+                  <a:rPr lang="en-US" altLang="ko-KR" sz="1200" err="1"/>
+                  <a:t>i_pc_addr</a:t>
+                </a:r>
+                <a:endParaRPr lang="ko-KR" altLang="en-US" sz="1200"/>
+              </a:p>
+            </p:txBody>
+          </p:sp>
+          <p:sp>
+            <p:nvSpPr>
+              <p:cNvPr id="28" name="TextBox 27">
+                <a:extLst>
+                  <a:ext uri="{FF2B5EF4-FFF2-40B4-BE49-F238E27FC236}">
+                    <a16:creationId xmlns:a16="http://schemas.microsoft.com/office/drawing/2014/main" id="{58CF8EB0-D4F6-86D0-9E21-9EA44BA33DCC}"/>
+                  </a:ext>
+                </a:extLst>
+              </p:cNvPr>
+              <p:cNvSpPr txBox="1"/>
+              <p:nvPr/>
+            </p:nvSpPr>
+            <p:spPr>
+              <a:xfrm>
+                <a:off x="7993147" y="1504583"/>
+                <a:ext cx="1209015" cy="276999"/>
+              </a:xfrm>
+              <a:prstGeom prst="rect">
+                <a:avLst/>
+              </a:prstGeom>
+              <a:noFill/>
+            </p:spPr>
+            <p:txBody>
+              <a:bodyPr wrap="square" rtlCol="0">
+                <a:spAutoFit/>
+              </a:bodyPr>
+              <a:lstStyle/>
+              <a:p>
+                <a:r>
+                  <a:rPr lang="en-US" altLang="ko-KR" sz="1200" err="1"/>
+                  <a:t>o_pc_addr</a:t>
+                </a:r>
+                <a:endParaRPr lang="ko-KR" altLang="en-US" sz="1200"/>
+              </a:p>
+            </p:txBody>
+          </p:sp>
+          <p:sp>
+            <p:nvSpPr>
+              <p:cNvPr id="34" name="TextBox 33">
+                <a:extLst>
+                  <a:ext uri="{FF2B5EF4-FFF2-40B4-BE49-F238E27FC236}">
+                    <a16:creationId xmlns:a16="http://schemas.microsoft.com/office/drawing/2014/main" id="{B0C49CC2-433D-9F5B-5C62-50ED9DD469B8}"/>
+                  </a:ext>
+                </a:extLst>
+              </p:cNvPr>
+              <p:cNvSpPr txBox="1"/>
+              <p:nvPr/>
+            </p:nvSpPr>
+            <p:spPr>
+              <a:xfrm>
+                <a:off x="5503940" y="1969007"/>
+                <a:ext cx="931232" cy="276999"/>
+              </a:xfrm>
+              <a:prstGeom prst="rect">
+                <a:avLst/>
+              </a:prstGeom>
+              <a:noFill/>
+            </p:spPr>
+            <p:txBody>
+              <a:bodyPr wrap="square" rtlCol="0">
+                <a:spAutoFit/>
+              </a:bodyPr>
+              <a:lstStyle/>
+              <a:p>
+                <a:r>
+                  <a:rPr lang="en-US" altLang="ko-KR" sz="1200" err="1"/>
+                  <a:t>i</a:t>
+                </a:r>
+                <a:r>
+                  <a:rPr lang="en-US" altLang="ko-KR" sz="1200"/>
+                  <a:t>_flush</a:t>
+                </a:r>
+                <a:endParaRPr lang="ko-KR" altLang="en-US" sz="1200"/>
+              </a:p>
+            </p:txBody>
+          </p:sp>
+          <p:sp>
+            <p:nvSpPr>
+              <p:cNvPr id="39" name="TextBox 38">
+                <a:extLst>
+                  <a:ext uri="{FF2B5EF4-FFF2-40B4-BE49-F238E27FC236}">
+                    <a16:creationId xmlns:a16="http://schemas.microsoft.com/office/drawing/2014/main" id="{4E52BE46-A022-88AA-1D32-49D22B88E6AB}"/>
+                  </a:ext>
+                </a:extLst>
+              </p:cNvPr>
+              <p:cNvSpPr txBox="1"/>
+              <p:nvPr/>
+            </p:nvSpPr>
+            <p:spPr>
+              <a:xfrm>
+                <a:off x="5503940" y="2323863"/>
+                <a:ext cx="931232" cy="276999"/>
+              </a:xfrm>
+              <a:prstGeom prst="rect">
+                <a:avLst/>
+              </a:prstGeom>
+              <a:noFill/>
+            </p:spPr>
+            <p:txBody>
+              <a:bodyPr wrap="square" rtlCol="0">
+                <a:spAutoFit/>
+              </a:bodyPr>
+              <a:lstStyle/>
+              <a:p>
+                <a:r>
+                  <a:rPr lang="en-US" altLang="ko-KR" sz="1200" err="1"/>
+                  <a:t>i</a:t>
+                </a:r>
+                <a:r>
+                  <a:rPr lang="en-US" altLang="ko-KR" sz="1200"/>
+                  <a:t>_stall</a:t>
+                </a:r>
+                <a:endParaRPr lang="ko-KR" altLang="en-US" sz="1200"/>
+              </a:p>
+            </p:txBody>
+          </p:sp>
+        </p:grpSp>
+        <p:cxnSp>
+          <p:nvCxnSpPr>
+            <p:cNvPr id="30" name="연결선: 꺾임 29">
+              <a:extLst>
+                <a:ext uri="{FF2B5EF4-FFF2-40B4-BE49-F238E27FC236}">
+                  <a16:creationId xmlns:a16="http://schemas.microsoft.com/office/drawing/2014/main" id="{B21AE390-7480-692D-1DCC-FD067341DA73}"/>
+                </a:ext>
+              </a:extLst>
+            </p:cNvPr>
+            <p:cNvCxnSpPr>
+              <a:cxnSpLocks/>
+            </p:cNvCxnSpPr>
+            <p:nvPr/>
+          </p:nvCxnSpPr>
+          <p:spPr>
+            <a:xfrm flipV="1">
+              <a:off x="706170" y="1982709"/>
+              <a:ext cx="1231123" cy="307818"/>
+            </a:xfrm>
+            <a:prstGeom prst="bentConnector3">
+              <a:avLst>
+                <a:gd name="adj1" fmla="val 100006"/>
+              </a:avLst>
+            </a:prstGeom>
+            <a:ln>
+              <a:tailEnd type="triangle"/>
+            </a:ln>
+          </p:spPr>
+          <p:style>
+            <a:lnRef idx="2">
+              <a:schemeClr val="dk1"/>
+            </a:lnRef>
+            <a:fillRef idx="0">
+              <a:schemeClr val="dk1"/>
+            </a:fillRef>
+            <a:effectRef idx="1">
+              <a:schemeClr val="dk1"/>
+            </a:effectRef>
+            <a:fontRef idx="minor">
+              <a:schemeClr val="tx1"/>
+            </a:fontRef>
+          </p:style>
+        </p:cxnSp>
+        <p:cxnSp>
+          <p:nvCxnSpPr>
+            <p:cNvPr id="36" name="연결선: 꺾임 35">
+              <a:extLst>
+                <a:ext uri="{FF2B5EF4-FFF2-40B4-BE49-F238E27FC236}">
+                  <a16:creationId xmlns:a16="http://schemas.microsoft.com/office/drawing/2014/main" id="{92B4B2BA-D11F-C26B-F231-8296E3E7A47E}"/>
+                </a:ext>
+              </a:extLst>
+            </p:cNvPr>
+            <p:cNvCxnSpPr>
+              <a:cxnSpLocks/>
+            </p:cNvCxnSpPr>
+            <p:nvPr/>
+          </p:nvCxnSpPr>
+          <p:spPr>
+            <a:xfrm flipV="1">
+              <a:off x="751438" y="1982709"/>
+              <a:ext cx="1615777" cy="660903"/>
+            </a:xfrm>
+            <a:prstGeom prst="bentConnector3">
+              <a:avLst>
+                <a:gd name="adj1" fmla="val 99868"/>
+              </a:avLst>
+            </a:prstGeom>
+            <a:ln>
+              <a:tailEnd type="triangle"/>
+            </a:ln>
+          </p:spPr>
+          <p:style>
+            <a:lnRef idx="2">
+              <a:schemeClr val="dk1"/>
+            </a:lnRef>
+            <a:fillRef idx="0">
+              <a:schemeClr val="dk1"/>
+            </a:fillRef>
+            <a:effectRef idx="1">
+              <a:schemeClr val="dk1"/>
+            </a:effectRef>
+            <a:fontRef idx="minor">
+              <a:schemeClr val="tx1"/>
+            </a:fontRef>
+          </p:style>
+        </p:cxnSp>
+      </p:grpSp>
     </p:spTree>
     <p:extLst>
       <p:ext uri="{BB962C8B-B14F-4D97-AF65-F5344CB8AC3E}">

--- a/Document/SoC_Design.pptx
+++ b/Document/SoC_Design.pptx
@@ -13,6 +13,7 @@
     <p:sldId id="261" r:id="rId7"/>
     <p:sldId id="262" r:id="rId8"/>
     <p:sldId id="263" r:id="rId9"/>
+    <p:sldId id="264" r:id="rId10"/>
   </p:sldIdLst>
   <p:sldSz cx="12192000" cy="6858000"/>
   <p:notesSz cx="6858000" cy="9144000"/>
@@ -266,7 +267,7 @@
           <a:p>
             <a:fld id="{91FFFBF6-1629-4DED-BCA1-F2A96F07D974}" type="datetimeFigureOut">
               <a:rPr lang="ko-KR" altLang="en-US" smtClean="0"/>
-              <a:t>2026-05-23</a:t>
+              <a:t>2026-05-24</a:t>
             </a:fld>
             <a:endParaRPr lang="ko-KR" altLang="en-US"/>
           </a:p>
@@ -464,7 +465,7 @@
           <a:p>
             <a:fld id="{91FFFBF6-1629-4DED-BCA1-F2A96F07D974}" type="datetimeFigureOut">
               <a:rPr lang="ko-KR" altLang="en-US" smtClean="0"/>
-              <a:t>2026-05-23</a:t>
+              <a:t>2026-05-24</a:t>
             </a:fld>
             <a:endParaRPr lang="ko-KR" altLang="en-US"/>
           </a:p>
@@ -672,7 +673,7 @@
           <a:p>
             <a:fld id="{91FFFBF6-1629-4DED-BCA1-F2A96F07D974}" type="datetimeFigureOut">
               <a:rPr lang="ko-KR" altLang="en-US" smtClean="0"/>
-              <a:t>2026-05-23</a:t>
+              <a:t>2026-05-24</a:t>
             </a:fld>
             <a:endParaRPr lang="ko-KR" altLang="en-US"/>
           </a:p>
@@ -870,7 +871,7 @@
           <a:p>
             <a:fld id="{91FFFBF6-1629-4DED-BCA1-F2A96F07D974}" type="datetimeFigureOut">
               <a:rPr lang="ko-KR" altLang="en-US" smtClean="0"/>
-              <a:t>2026-05-23</a:t>
+              <a:t>2026-05-24</a:t>
             </a:fld>
             <a:endParaRPr lang="ko-KR" altLang="en-US"/>
           </a:p>
@@ -1145,7 +1146,7 @@
           <a:p>
             <a:fld id="{91FFFBF6-1629-4DED-BCA1-F2A96F07D974}" type="datetimeFigureOut">
               <a:rPr lang="ko-KR" altLang="en-US" smtClean="0"/>
-              <a:t>2026-05-23</a:t>
+              <a:t>2026-05-24</a:t>
             </a:fld>
             <a:endParaRPr lang="ko-KR" altLang="en-US"/>
           </a:p>
@@ -1410,7 +1411,7 @@
           <a:p>
             <a:fld id="{91FFFBF6-1629-4DED-BCA1-F2A96F07D974}" type="datetimeFigureOut">
               <a:rPr lang="ko-KR" altLang="en-US" smtClean="0"/>
-              <a:t>2026-05-23</a:t>
+              <a:t>2026-05-24</a:t>
             </a:fld>
             <a:endParaRPr lang="ko-KR" altLang="en-US"/>
           </a:p>
@@ -1822,7 +1823,7 @@
           <a:p>
             <a:fld id="{91FFFBF6-1629-4DED-BCA1-F2A96F07D974}" type="datetimeFigureOut">
               <a:rPr lang="ko-KR" altLang="en-US" smtClean="0"/>
-              <a:t>2026-05-23</a:t>
+              <a:t>2026-05-24</a:t>
             </a:fld>
             <a:endParaRPr lang="ko-KR" altLang="en-US"/>
           </a:p>
@@ -1963,7 +1964,7 @@
           <a:p>
             <a:fld id="{91FFFBF6-1629-4DED-BCA1-F2A96F07D974}" type="datetimeFigureOut">
               <a:rPr lang="ko-KR" altLang="en-US" smtClean="0"/>
-              <a:t>2026-05-23</a:t>
+              <a:t>2026-05-24</a:t>
             </a:fld>
             <a:endParaRPr lang="ko-KR" altLang="en-US"/>
           </a:p>
@@ -2076,7 +2077,7 @@
           <a:p>
             <a:fld id="{91FFFBF6-1629-4DED-BCA1-F2A96F07D974}" type="datetimeFigureOut">
               <a:rPr lang="ko-KR" altLang="en-US" smtClean="0"/>
-              <a:t>2026-05-23</a:t>
+              <a:t>2026-05-24</a:t>
             </a:fld>
             <a:endParaRPr lang="ko-KR" altLang="en-US"/>
           </a:p>
@@ -2387,7 +2388,7 @@
           <a:p>
             <a:fld id="{91FFFBF6-1629-4DED-BCA1-F2A96F07D974}" type="datetimeFigureOut">
               <a:rPr lang="ko-KR" altLang="en-US" smtClean="0"/>
-              <a:t>2026-05-23</a:t>
+              <a:t>2026-05-24</a:t>
             </a:fld>
             <a:endParaRPr lang="ko-KR" altLang="en-US"/>
           </a:p>
@@ -2675,7 +2676,7 @@
           <a:p>
             <a:fld id="{91FFFBF6-1629-4DED-BCA1-F2A96F07D974}" type="datetimeFigureOut">
               <a:rPr lang="ko-KR" altLang="en-US" smtClean="0"/>
-              <a:t>2026-05-23</a:t>
+              <a:t>2026-05-24</a:t>
             </a:fld>
             <a:endParaRPr lang="ko-KR" altLang="en-US"/>
           </a:p>
@@ -2916,7 +2917,7 @@
           <a:p>
             <a:fld id="{91FFFBF6-1629-4DED-BCA1-F2A96F07D974}" type="datetimeFigureOut">
               <a:rPr lang="ko-KR" altLang="en-US" smtClean="0"/>
-              <a:t>2026-05-23</a:t>
+              <a:t>2026-05-24</a:t>
             </a:fld>
             <a:endParaRPr lang="ko-KR" altLang="en-US"/>
           </a:p>
@@ -18203,6 +18204,66 @@
 </p:sld>
 </file>
 
+<file path=ppt/slides/slide9.xml><?xml version="1.0" encoding="utf-8"?>
+<p:sld xmlns:a="http://schemas.openxmlformats.org/drawingml/2006/main" xmlns:r="http://schemas.openxmlformats.org/officeDocument/2006/relationships" xmlns:p="http://schemas.openxmlformats.org/presentationml/2006/main">
+  <p:cSld>
+    <p:spTree>
+      <p:nvGrpSpPr>
+        <p:cNvPr id="1" name=""/>
+        <p:cNvGrpSpPr/>
+        <p:nvPr/>
+      </p:nvGrpSpPr>
+      <p:grpSpPr>
+        <a:xfrm>
+          <a:off x="0" y="0"/>
+          <a:ext cx="0" cy="0"/>
+          <a:chOff x="0" y="0"/>
+          <a:chExt cx="0" cy="0"/>
+        </a:xfrm>
+      </p:grpSpPr>
+      <p:pic>
+        <p:nvPicPr>
+          <p:cNvPr id="5" name="그림 4">
+            <a:extLst>
+              <a:ext uri="{FF2B5EF4-FFF2-40B4-BE49-F238E27FC236}">
+                <a16:creationId xmlns:a16="http://schemas.microsoft.com/office/drawing/2014/main" id="{25F4936A-A1C0-E1E6-F884-DBFC109B0E7E}"/>
+              </a:ext>
+            </a:extLst>
+          </p:cNvPr>
+          <p:cNvPicPr>
+            <a:picLocks noChangeAspect="1"/>
+          </p:cNvPicPr>
+          <p:nvPr/>
+        </p:nvPicPr>
+        <p:blipFill>
+          <a:blip r:embed="rId2"/>
+          <a:stretch>
+            <a:fillRect/>
+          </a:stretch>
+        </p:blipFill>
+        <p:spPr>
+          <a:xfrm>
+            <a:off x="2380731" y="1485629"/>
+            <a:ext cx="7430537" cy="3886742"/>
+          </a:xfrm>
+          <a:prstGeom prst="rect">
+            <a:avLst/>
+          </a:prstGeom>
+        </p:spPr>
+      </p:pic>
+    </p:spTree>
+    <p:extLst>
+      <p:ext uri="{BB962C8B-B14F-4D97-AF65-F5344CB8AC3E}">
+        <p14:creationId xmlns:p14="http://schemas.microsoft.com/office/powerpoint/2010/main" val="1040336693"/>
+      </p:ext>
+    </p:extLst>
+  </p:cSld>
+  <p:clrMapOvr>
+    <a:masterClrMapping/>
+  </p:clrMapOvr>
+</p:sld>
+</file>
+
 <file path=ppt/theme/theme1.xml><?xml version="1.0" encoding="utf-8"?>
 <a:theme xmlns:a="http://schemas.openxmlformats.org/drawingml/2006/main" name="Office 테마">
   <a:themeElements>
